--- a/presentation/diplom_presentation.pptx
+++ b/presentation/diplom_presentation.pptx
@@ -5,7 +5,7 @@
     <p:sldMasterId id="2147483659" r:id="rId1"/>
   </p:sldMasterIdLst>
   <p:notesMasterIdLst>
-    <p:notesMasterId r:id="rId27"/>
+    <p:notesMasterId r:id="rId28"/>
   </p:notesMasterIdLst>
   <p:sldIdLst>
     <p:sldId id="256" r:id="rId2"/>
@@ -32,24 +32,25 @@
     <p:sldId id="274" r:id="rId23"/>
     <p:sldId id="275" r:id="rId24"/>
     <p:sldId id="276" r:id="rId25"/>
-    <p:sldId id="277" r:id="rId26"/>
+    <p:sldId id="286" r:id="rId26"/>
+    <p:sldId id="277" r:id="rId27"/>
   </p:sldIdLst>
   <p:sldSz cx="12192000" cy="6858000"/>
   <p:notesSz cx="6858000" cy="9144000"/>
   <p:embeddedFontLst>
     <p:embeddedFont>
       <p:font typeface="Lato" panose="020F0502020204030203" pitchFamily="34" charset="0"/>
-      <p:regular r:id="rId28"/>
-      <p:bold r:id="rId29"/>
-      <p:italic r:id="rId30"/>
-      <p:boldItalic r:id="rId31"/>
+      <p:regular r:id="rId29"/>
+      <p:bold r:id="rId30"/>
+      <p:italic r:id="rId31"/>
+      <p:boldItalic r:id="rId32"/>
     </p:embeddedFont>
     <p:embeddedFont>
       <p:font typeface="Poppins" panose="00000500000000000000" pitchFamily="2" charset="0"/>
-      <p:regular r:id="rId32"/>
-      <p:bold r:id="rId33"/>
-      <p:italic r:id="rId34"/>
-      <p:boldItalic r:id="rId35"/>
+      <p:regular r:id="rId33"/>
+      <p:bold r:id="rId34"/>
+      <p:italic r:id="rId35"/>
+      <p:boldItalic r:id="rId36"/>
     </p:embeddedFont>
   </p:embeddedFontLst>
   <p:defaultTextStyle>
@@ -2591,6 +2592,133 @@
   <p:cSld>
     <p:spTree>
       <p:nvGrpSpPr>
+        <p:cNvPr id="1" name="Shape 435">
+          <a:extLst>
+            <a:ext uri="{FF2B5EF4-FFF2-40B4-BE49-F238E27FC236}">
+              <a16:creationId xmlns:a16="http://schemas.microsoft.com/office/drawing/2014/main" id="{2BDF6F6A-02D2-D807-9312-A712DCF32FF1}"/>
+            </a:ext>
+          </a:extLst>
+        </p:cNvPr>
+        <p:cNvGrpSpPr/>
+        <p:nvPr/>
+      </p:nvGrpSpPr>
+      <p:grpSpPr>
+        <a:xfrm>
+          <a:off x="0" y="0"/>
+          <a:ext cx="0" cy="0"/>
+          <a:chOff x="0" y="0"/>
+          <a:chExt cx="0" cy="0"/>
+        </a:xfrm>
+      </p:grpSpPr>
+      <p:sp>
+        <p:nvSpPr>
+          <p:cNvPr id="436" name="Google Shape;436;p21:notes">
+            <a:extLst>
+              <a:ext uri="{FF2B5EF4-FFF2-40B4-BE49-F238E27FC236}">
+                <a16:creationId xmlns:a16="http://schemas.microsoft.com/office/drawing/2014/main" id="{491D5CA7-79DF-3C1A-AF6B-19227D48A01A}"/>
+              </a:ext>
+            </a:extLst>
+          </p:cNvPr>
+          <p:cNvSpPr txBox="1">
+            <a:spLocks noGrp="1"/>
+          </p:cNvSpPr>
+          <p:nvPr>
+            <p:ph type="body" idx="1"/>
+          </p:nvPr>
+        </p:nvSpPr>
+        <p:spPr>
+          <a:xfrm>
+            <a:off x="685800" y="4343400"/>
+            <a:ext cx="5486400" cy="4114800"/>
+          </a:xfrm>
+          <a:prstGeom prst="rect">
+            <a:avLst/>
+          </a:prstGeom>
+        </p:spPr>
+        <p:txBody>
+          <a:bodyPr spcFirstLastPara="1" wrap="square" lIns="91425" tIns="91425" rIns="91425" bIns="91425" anchor="t" anchorCtr="0">
+            <a:noAutofit/>
+          </a:bodyPr>
+          <a:lstStyle/>
+          <a:p>
+            <a:pPr marL="0" lvl="0" indent="0" algn="l" rtl="0">
+              <a:spcBef>
+                <a:spcPts val="0"/>
+              </a:spcBef>
+              <a:spcAft>
+                <a:spcPts val="0"/>
+              </a:spcAft>
+              <a:buNone/>
+            </a:pPr>
+            <a:endParaRPr/>
+          </a:p>
+        </p:txBody>
+      </p:sp>
+      <p:sp>
+        <p:nvSpPr>
+          <p:cNvPr id="437" name="Google Shape;437;p21:notes">
+            <a:extLst>
+              <a:ext uri="{FF2B5EF4-FFF2-40B4-BE49-F238E27FC236}">
+                <a16:creationId xmlns:a16="http://schemas.microsoft.com/office/drawing/2014/main" id="{3B270B5F-E6AD-15D7-FB16-EFE5AF308759}"/>
+              </a:ext>
+            </a:extLst>
+          </p:cNvPr>
+          <p:cNvSpPr>
+            <a:spLocks noGrp="1" noRot="1" noChangeAspect="1"/>
+          </p:cNvSpPr>
+          <p:nvPr>
+            <p:ph type="sldImg" idx="2"/>
+          </p:nvPr>
+        </p:nvSpPr>
+        <p:spPr>
+          <a:xfrm>
+            <a:off x="381000" y="685800"/>
+            <a:ext cx="6096000" cy="3429000"/>
+          </a:xfrm>
+          <a:custGeom>
+            <a:avLst/>
+            <a:gdLst/>
+            <a:ahLst/>
+            <a:cxnLst/>
+            <a:rect l="l" t="t" r="r" b="b"/>
+            <a:pathLst>
+              <a:path w="120000" h="120000" extrusionOk="0">
+                <a:moveTo>
+                  <a:pt x="0" y="0"/>
+                </a:moveTo>
+                <a:lnTo>
+                  <a:pt x="120000" y="0"/>
+                </a:lnTo>
+                <a:lnTo>
+                  <a:pt x="120000" y="120000"/>
+                </a:lnTo>
+                <a:lnTo>
+                  <a:pt x="0" y="120000"/>
+                </a:lnTo>
+                <a:close/>
+              </a:path>
+            </a:pathLst>
+          </a:custGeom>
+        </p:spPr>
+      </p:sp>
+    </p:spTree>
+    <p:extLst>
+      <p:ext uri="{BB962C8B-B14F-4D97-AF65-F5344CB8AC3E}">
+        <p14:creationId xmlns:p14="http://schemas.microsoft.com/office/powerpoint/2010/main" val="176815632"/>
+      </p:ext>
+    </p:extLst>
+  </p:cSld>
+  <p:clrMapOvr>
+    <a:masterClrMapping/>
+  </p:clrMapOvr>
+</p:notes>
+</file>
+
+<file path=ppt/notesSlides/notesSlide26.xml><?xml version="1.0" encoding="utf-8"?>
+<p:notes xmlns:a="http://schemas.openxmlformats.org/drawingml/2006/main" xmlns:r="http://schemas.openxmlformats.org/officeDocument/2006/relationships" xmlns:p="http://schemas.openxmlformats.org/presentationml/2006/main" showMasterSp="0" showMasterPhAnim="0">
+  <p:cSld>
+    <p:spTree>
+      <p:nvGrpSpPr>
         <p:cNvPr id="1" name="Shape 451"/>
         <p:cNvGrpSpPr/>
         <p:nvPr/>
@@ -3843,863 +3971,6 @@
 </file>
 
 <file path=ppt/slideLayouts/slideLayout2.xml><?xml version="1.0" encoding="utf-8"?>
-<p:sldLayout xmlns:a="http://schemas.openxmlformats.org/drawingml/2006/main" xmlns:r="http://schemas.openxmlformats.org/officeDocument/2006/relationships" xmlns:p="http://schemas.openxmlformats.org/presentationml/2006/main" matchingName="Two Content" type="twoObj">
-  <p:cSld name="TWO_OBJECTS">
-    <p:spTree>
-      <p:nvGrpSpPr>
-        <p:cNvPr id="1" name="Shape 33"/>
-        <p:cNvGrpSpPr/>
-        <p:nvPr/>
-      </p:nvGrpSpPr>
-      <p:grpSpPr>
-        <a:xfrm>
-          <a:off x="0" y="0"/>
-          <a:ext cx="0" cy="0"/>
-          <a:chOff x="0" y="0"/>
-          <a:chExt cx="0" cy="0"/>
-        </a:xfrm>
-      </p:grpSpPr>
-      <p:sp>
-        <p:nvSpPr>
-          <p:cNvPr id="34" name="Google Shape;34;p6"/>
-          <p:cNvSpPr txBox="1">
-            <a:spLocks noGrp="1"/>
-          </p:cNvSpPr>
-          <p:nvPr>
-            <p:ph type="title"/>
-          </p:nvPr>
-        </p:nvSpPr>
-        <p:spPr>
-          <a:xfrm>
-            <a:off x="457200" y="274638"/>
-            <a:ext cx="8229600" cy="1143000"/>
-          </a:xfrm>
-          <a:prstGeom prst="rect">
-            <a:avLst/>
-          </a:prstGeom>
-          <a:noFill/>
-          <a:ln>
-            <a:noFill/>
-          </a:ln>
-        </p:spPr>
-        <p:txBody>
-          <a:bodyPr spcFirstLastPara="1" wrap="square" lIns="91425" tIns="45700" rIns="91425" bIns="45700" anchor="ctr" anchorCtr="0">
-            <a:normAutofit/>
-          </a:bodyPr>
-          <a:lstStyle>
-            <a:lvl1pPr lvl="0" algn="ctr">
-              <a:spcBef>
-                <a:spcPts val="0"/>
-              </a:spcBef>
-              <a:spcAft>
-                <a:spcPts val="0"/>
-              </a:spcAft>
-              <a:buClr>
-                <a:schemeClr val="dk1"/>
-              </a:buClr>
-              <a:buSzPts val="1800"/>
-              <a:buNone/>
-              <a:defRPr/>
-            </a:lvl1pPr>
-            <a:lvl2pPr lvl="1">
-              <a:spcBef>
-                <a:spcPts val="0"/>
-              </a:spcBef>
-              <a:spcAft>
-                <a:spcPts val="0"/>
-              </a:spcAft>
-              <a:buSzPts val="1400"/>
-              <a:buNone/>
-              <a:defRPr/>
-            </a:lvl2pPr>
-            <a:lvl3pPr lvl="2">
-              <a:spcBef>
-                <a:spcPts val="0"/>
-              </a:spcBef>
-              <a:spcAft>
-                <a:spcPts val="0"/>
-              </a:spcAft>
-              <a:buSzPts val="1400"/>
-              <a:buNone/>
-              <a:defRPr/>
-            </a:lvl3pPr>
-            <a:lvl4pPr lvl="3">
-              <a:spcBef>
-                <a:spcPts val="0"/>
-              </a:spcBef>
-              <a:spcAft>
-                <a:spcPts val="0"/>
-              </a:spcAft>
-              <a:buSzPts val="1400"/>
-              <a:buNone/>
-              <a:defRPr/>
-            </a:lvl4pPr>
-            <a:lvl5pPr lvl="4">
-              <a:spcBef>
-                <a:spcPts val="0"/>
-              </a:spcBef>
-              <a:spcAft>
-                <a:spcPts val="0"/>
-              </a:spcAft>
-              <a:buSzPts val="1400"/>
-              <a:buNone/>
-              <a:defRPr/>
-            </a:lvl5pPr>
-            <a:lvl6pPr lvl="5">
-              <a:spcBef>
-                <a:spcPts val="0"/>
-              </a:spcBef>
-              <a:spcAft>
-                <a:spcPts val="0"/>
-              </a:spcAft>
-              <a:buSzPts val="1400"/>
-              <a:buNone/>
-              <a:defRPr/>
-            </a:lvl6pPr>
-            <a:lvl7pPr lvl="6">
-              <a:spcBef>
-                <a:spcPts val="0"/>
-              </a:spcBef>
-              <a:spcAft>
-                <a:spcPts val="0"/>
-              </a:spcAft>
-              <a:buSzPts val="1400"/>
-              <a:buNone/>
-              <a:defRPr/>
-            </a:lvl7pPr>
-            <a:lvl8pPr lvl="7">
-              <a:spcBef>
-                <a:spcPts val="0"/>
-              </a:spcBef>
-              <a:spcAft>
-                <a:spcPts val="0"/>
-              </a:spcAft>
-              <a:buSzPts val="1400"/>
-              <a:buNone/>
-              <a:defRPr/>
-            </a:lvl8pPr>
-            <a:lvl9pPr lvl="8">
-              <a:spcBef>
-                <a:spcPts val="0"/>
-              </a:spcBef>
-              <a:spcAft>
-                <a:spcPts val="0"/>
-              </a:spcAft>
-              <a:buSzPts val="1400"/>
-              <a:buNone/>
-              <a:defRPr/>
-            </a:lvl9pPr>
-          </a:lstStyle>
-          <a:p>
-            <a:endParaRPr/>
-          </a:p>
-        </p:txBody>
-      </p:sp>
-      <p:sp>
-        <p:nvSpPr>
-          <p:cNvPr id="35" name="Google Shape;35;p6"/>
-          <p:cNvSpPr txBox="1">
-            <a:spLocks noGrp="1"/>
-          </p:cNvSpPr>
-          <p:nvPr>
-            <p:ph type="body" idx="1"/>
-          </p:nvPr>
-        </p:nvSpPr>
-        <p:spPr>
-          <a:xfrm>
-            <a:off x="457200" y="1600200"/>
-            <a:ext cx="4038600" cy="4525963"/>
-          </a:xfrm>
-          <a:prstGeom prst="rect">
-            <a:avLst/>
-          </a:prstGeom>
-          <a:noFill/>
-          <a:ln>
-            <a:noFill/>
-          </a:ln>
-        </p:spPr>
-        <p:txBody>
-          <a:bodyPr spcFirstLastPara="1" wrap="square" lIns="91425" tIns="45700" rIns="91425" bIns="45700" anchor="t" anchorCtr="0">
-            <a:normAutofit/>
-          </a:bodyPr>
-          <a:lstStyle>
-            <a:lvl1pPr marL="457200" lvl="0" indent="-406400" algn="l">
-              <a:spcBef>
-                <a:spcPts val="560"/>
-              </a:spcBef>
-              <a:spcAft>
-                <a:spcPts val="0"/>
-              </a:spcAft>
-              <a:buClr>
-                <a:schemeClr val="dk1"/>
-              </a:buClr>
-              <a:buSzPts val="2800"/>
-              <a:buChar char="•"/>
-              <a:defRPr sz="2800"/>
-            </a:lvl1pPr>
-            <a:lvl2pPr marL="914400" lvl="1" indent="-381000" algn="l">
-              <a:spcBef>
-                <a:spcPts val="480"/>
-              </a:spcBef>
-              <a:spcAft>
-                <a:spcPts val="0"/>
-              </a:spcAft>
-              <a:buClr>
-                <a:schemeClr val="dk1"/>
-              </a:buClr>
-              <a:buSzPts val="2400"/>
-              <a:buChar char="–"/>
-              <a:defRPr sz="2400"/>
-            </a:lvl2pPr>
-            <a:lvl3pPr marL="1371600" lvl="2" indent="-355600" algn="l">
-              <a:spcBef>
-                <a:spcPts val="400"/>
-              </a:spcBef>
-              <a:spcAft>
-                <a:spcPts val="0"/>
-              </a:spcAft>
-              <a:buClr>
-                <a:schemeClr val="dk1"/>
-              </a:buClr>
-              <a:buSzPts val="2000"/>
-              <a:buChar char="•"/>
-              <a:defRPr sz="2000"/>
-            </a:lvl3pPr>
-            <a:lvl4pPr marL="1828800" lvl="3" indent="-342900" algn="l">
-              <a:spcBef>
-                <a:spcPts val="360"/>
-              </a:spcBef>
-              <a:spcAft>
-                <a:spcPts val="0"/>
-              </a:spcAft>
-              <a:buClr>
-                <a:schemeClr val="dk1"/>
-              </a:buClr>
-              <a:buSzPts val="1800"/>
-              <a:buChar char="–"/>
-              <a:defRPr sz="1800"/>
-            </a:lvl4pPr>
-            <a:lvl5pPr marL="2286000" lvl="4" indent="-342900" algn="l">
-              <a:spcBef>
-                <a:spcPts val="360"/>
-              </a:spcBef>
-              <a:spcAft>
-                <a:spcPts val="0"/>
-              </a:spcAft>
-              <a:buClr>
-                <a:schemeClr val="dk1"/>
-              </a:buClr>
-              <a:buSzPts val="1800"/>
-              <a:buChar char="»"/>
-              <a:defRPr sz="1800"/>
-            </a:lvl5pPr>
-            <a:lvl6pPr marL="2743200" lvl="5" indent="-342900" algn="l">
-              <a:spcBef>
-                <a:spcPts val="360"/>
-              </a:spcBef>
-              <a:spcAft>
-                <a:spcPts val="0"/>
-              </a:spcAft>
-              <a:buClr>
-                <a:schemeClr val="dk1"/>
-              </a:buClr>
-              <a:buSzPts val="1800"/>
-              <a:buChar char="•"/>
-              <a:defRPr sz="1800"/>
-            </a:lvl6pPr>
-            <a:lvl7pPr marL="3200400" lvl="6" indent="-342900" algn="l">
-              <a:spcBef>
-                <a:spcPts val="360"/>
-              </a:spcBef>
-              <a:spcAft>
-                <a:spcPts val="0"/>
-              </a:spcAft>
-              <a:buClr>
-                <a:schemeClr val="dk1"/>
-              </a:buClr>
-              <a:buSzPts val="1800"/>
-              <a:buChar char="•"/>
-              <a:defRPr sz="1800"/>
-            </a:lvl7pPr>
-            <a:lvl8pPr marL="3657600" lvl="7" indent="-342900" algn="l">
-              <a:spcBef>
-                <a:spcPts val="360"/>
-              </a:spcBef>
-              <a:spcAft>
-                <a:spcPts val="0"/>
-              </a:spcAft>
-              <a:buClr>
-                <a:schemeClr val="dk1"/>
-              </a:buClr>
-              <a:buSzPts val="1800"/>
-              <a:buChar char="•"/>
-              <a:defRPr sz="1800"/>
-            </a:lvl8pPr>
-            <a:lvl9pPr marL="4114800" lvl="8" indent="-342900" algn="l">
-              <a:spcBef>
-                <a:spcPts val="360"/>
-              </a:spcBef>
-              <a:spcAft>
-                <a:spcPts val="0"/>
-              </a:spcAft>
-              <a:buClr>
-                <a:schemeClr val="dk1"/>
-              </a:buClr>
-              <a:buSzPts val="1800"/>
-              <a:buChar char="•"/>
-              <a:defRPr sz="1800"/>
-            </a:lvl9pPr>
-          </a:lstStyle>
-          <a:p>
-            <a:endParaRPr/>
-          </a:p>
-        </p:txBody>
-      </p:sp>
-      <p:sp>
-        <p:nvSpPr>
-          <p:cNvPr id="36" name="Google Shape;36;p6"/>
-          <p:cNvSpPr txBox="1">
-            <a:spLocks noGrp="1"/>
-          </p:cNvSpPr>
-          <p:nvPr>
-            <p:ph type="body" idx="2"/>
-          </p:nvPr>
-        </p:nvSpPr>
-        <p:spPr>
-          <a:xfrm>
-            <a:off x="4648200" y="1600200"/>
-            <a:ext cx="4038600" cy="4525963"/>
-          </a:xfrm>
-          <a:prstGeom prst="rect">
-            <a:avLst/>
-          </a:prstGeom>
-          <a:noFill/>
-          <a:ln>
-            <a:noFill/>
-          </a:ln>
-        </p:spPr>
-        <p:txBody>
-          <a:bodyPr spcFirstLastPara="1" wrap="square" lIns="91425" tIns="45700" rIns="91425" bIns="45700" anchor="t" anchorCtr="0">
-            <a:normAutofit/>
-          </a:bodyPr>
-          <a:lstStyle>
-            <a:lvl1pPr marL="457200" lvl="0" indent="-406400" algn="l">
-              <a:spcBef>
-                <a:spcPts val="560"/>
-              </a:spcBef>
-              <a:spcAft>
-                <a:spcPts val="0"/>
-              </a:spcAft>
-              <a:buClr>
-                <a:schemeClr val="dk1"/>
-              </a:buClr>
-              <a:buSzPts val="2800"/>
-              <a:buChar char="•"/>
-              <a:defRPr sz="2800"/>
-            </a:lvl1pPr>
-            <a:lvl2pPr marL="914400" lvl="1" indent="-381000" algn="l">
-              <a:spcBef>
-                <a:spcPts val="480"/>
-              </a:spcBef>
-              <a:spcAft>
-                <a:spcPts val="0"/>
-              </a:spcAft>
-              <a:buClr>
-                <a:schemeClr val="dk1"/>
-              </a:buClr>
-              <a:buSzPts val="2400"/>
-              <a:buChar char="–"/>
-              <a:defRPr sz="2400"/>
-            </a:lvl2pPr>
-            <a:lvl3pPr marL="1371600" lvl="2" indent="-355600" algn="l">
-              <a:spcBef>
-                <a:spcPts val="400"/>
-              </a:spcBef>
-              <a:spcAft>
-                <a:spcPts val="0"/>
-              </a:spcAft>
-              <a:buClr>
-                <a:schemeClr val="dk1"/>
-              </a:buClr>
-              <a:buSzPts val="2000"/>
-              <a:buChar char="•"/>
-              <a:defRPr sz="2000"/>
-            </a:lvl3pPr>
-            <a:lvl4pPr marL="1828800" lvl="3" indent="-342900" algn="l">
-              <a:spcBef>
-                <a:spcPts val="360"/>
-              </a:spcBef>
-              <a:spcAft>
-                <a:spcPts val="0"/>
-              </a:spcAft>
-              <a:buClr>
-                <a:schemeClr val="dk1"/>
-              </a:buClr>
-              <a:buSzPts val="1800"/>
-              <a:buChar char="–"/>
-              <a:defRPr sz="1800"/>
-            </a:lvl4pPr>
-            <a:lvl5pPr marL="2286000" lvl="4" indent="-342900" algn="l">
-              <a:spcBef>
-                <a:spcPts val="360"/>
-              </a:spcBef>
-              <a:spcAft>
-                <a:spcPts val="0"/>
-              </a:spcAft>
-              <a:buClr>
-                <a:schemeClr val="dk1"/>
-              </a:buClr>
-              <a:buSzPts val="1800"/>
-              <a:buChar char="»"/>
-              <a:defRPr sz="1800"/>
-            </a:lvl5pPr>
-            <a:lvl6pPr marL="2743200" lvl="5" indent="-342900" algn="l">
-              <a:spcBef>
-                <a:spcPts val="360"/>
-              </a:spcBef>
-              <a:spcAft>
-                <a:spcPts val="0"/>
-              </a:spcAft>
-              <a:buClr>
-                <a:schemeClr val="dk1"/>
-              </a:buClr>
-              <a:buSzPts val="1800"/>
-              <a:buChar char="•"/>
-              <a:defRPr sz="1800"/>
-            </a:lvl6pPr>
-            <a:lvl7pPr marL="3200400" lvl="6" indent="-342900" algn="l">
-              <a:spcBef>
-                <a:spcPts val="360"/>
-              </a:spcBef>
-              <a:spcAft>
-                <a:spcPts val="0"/>
-              </a:spcAft>
-              <a:buClr>
-                <a:schemeClr val="dk1"/>
-              </a:buClr>
-              <a:buSzPts val="1800"/>
-              <a:buChar char="•"/>
-              <a:defRPr sz="1800"/>
-            </a:lvl7pPr>
-            <a:lvl8pPr marL="3657600" lvl="7" indent="-342900" algn="l">
-              <a:spcBef>
-                <a:spcPts val="360"/>
-              </a:spcBef>
-              <a:spcAft>
-                <a:spcPts val="0"/>
-              </a:spcAft>
-              <a:buClr>
-                <a:schemeClr val="dk1"/>
-              </a:buClr>
-              <a:buSzPts val="1800"/>
-              <a:buChar char="•"/>
-              <a:defRPr sz="1800"/>
-            </a:lvl8pPr>
-            <a:lvl9pPr marL="4114800" lvl="8" indent="-342900" algn="l">
-              <a:spcBef>
-                <a:spcPts val="360"/>
-              </a:spcBef>
-              <a:spcAft>
-                <a:spcPts val="0"/>
-              </a:spcAft>
-              <a:buClr>
-                <a:schemeClr val="dk1"/>
-              </a:buClr>
-              <a:buSzPts val="1800"/>
-              <a:buChar char="•"/>
-              <a:defRPr sz="1800"/>
-            </a:lvl9pPr>
-          </a:lstStyle>
-          <a:p>
-            <a:endParaRPr/>
-          </a:p>
-        </p:txBody>
-      </p:sp>
-      <p:sp>
-        <p:nvSpPr>
-          <p:cNvPr id="37" name="Google Shape;37;p6"/>
-          <p:cNvSpPr txBox="1">
-            <a:spLocks noGrp="1"/>
-          </p:cNvSpPr>
-          <p:nvPr>
-            <p:ph type="dt" idx="10"/>
-          </p:nvPr>
-        </p:nvSpPr>
-        <p:spPr>
-          <a:xfrm>
-            <a:off x="457200" y="6356350"/>
-            <a:ext cx="2133600" cy="365125"/>
-          </a:xfrm>
-          <a:prstGeom prst="rect">
-            <a:avLst/>
-          </a:prstGeom>
-          <a:noFill/>
-          <a:ln>
-            <a:noFill/>
-          </a:ln>
-        </p:spPr>
-        <p:txBody>
-          <a:bodyPr spcFirstLastPara="1" wrap="square" lIns="91425" tIns="45700" rIns="91425" bIns="45700" anchor="ctr" anchorCtr="0">
-            <a:noAutofit/>
-          </a:bodyPr>
-          <a:lstStyle>
-            <a:lvl1pPr lvl="0" algn="l">
-              <a:spcBef>
-                <a:spcPts val="0"/>
-              </a:spcBef>
-              <a:spcAft>
-                <a:spcPts val="0"/>
-              </a:spcAft>
-              <a:buSzPts val="1400"/>
-              <a:buNone/>
-              <a:defRPr/>
-            </a:lvl1pPr>
-            <a:lvl2pPr lvl="1" algn="l">
-              <a:spcBef>
-                <a:spcPts val="0"/>
-              </a:spcBef>
-              <a:spcAft>
-                <a:spcPts val="0"/>
-              </a:spcAft>
-              <a:buSzPts val="1400"/>
-              <a:buNone/>
-              <a:defRPr/>
-            </a:lvl2pPr>
-            <a:lvl3pPr lvl="2" algn="l">
-              <a:spcBef>
-                <a:spcPts val="0"/>
-              </a:spcBef>
-              <a:spcAft>
-                <a:spcPts val="0"/>
-              </a:spcAft>
-              <a:buSzPts val="1400"/>
-              <a:buNone/>
-              <a:defRPr/>
-            </a:lvl3pPr>
-            <a:lvl4pPr lvl="3" algn="l">
-              <a:spcBef>
-                <a:spcPts val="0"/>
-              </a:spcBef>
-              <a:spcAft>
-                <a:spcPts val="0"/>
-              </a:spcAft>
-              <a:buSzPts val="1400"/>
-              <a:buNone/>
-              <a:defRPr/>
-            </a:lvl4pPr>
-            <a:lvl5pPr lvl="4" algn="l">
-              <a:spcBef>
-                <a:spcPts val="0"/>
-              </a:spcBef>
-              <a:spcAft>
-                <a:spcPts val="0"/>
-              </a:spcAft>
-              <a:buSzPts val="1400"/>
-              <a:buNone/>
-              <a:defRPr/>
-            </a:lvl5pPr>
-            <a:lvl6pPr lvl="5" algn="l">
-              <a:spcBef>
-                <a:spcPts val="0"/>
-              </a:spcBef>
-              <a:spcAft>
-                <a:spcPts val="0"/>
-              </a:spcAft>
-              <a:buSzPts val="1400"/>
-              <a:buNone/>
-              <a:defRPr/>
-            </a:lvl6pPr>
-            <a:lvl7pPr lvl="6" algn="l">
-              <a:spcBef>
-                <a:spcPts val="0"/>
-              </a:spcBef>
-              <a:spcAft>
-                <a:spcPts val="0"/>
-              </a:spcAft>
-              <a:buSzPts val="1400"/>
-              <a:buNone/>
-              <a:defRPr/>
-            </a:lvl7pPr>
-            <a:lvl8pPr lvl="7" algn="l">
-              <a:spcBef>
-                <a:spcPts val="0"/>
-              </a:spcBef>
-              <a:spcAft>
-                <a:spcPts val="0"/>
-              </a:spcAft>
-              <a:buSzPts val="1400"/>
-              <a:buNone/>
-              <a:defRPr/>
-            </a:lvl8pPr>
-            <a:lvl9pPr lvl="8" algn="l">
-              <a:spcBef>
-                <a:spcPts val="0"/>
-              </a:spcBef>
-              <a:spcAft>
-                <a:spcPts val="0"/>
-              </a:spcAft>
-              <a:buSzPts val="1400"/>
-              <a:buNone/>
-              <a:defRPr/>
-            </a:lvl9pPr>
-          </a:lstStyle>
-          <a:p>
-            <a:endParaRPr/>
-          </a:p>
-        </p:txBody>
-      </p:sp>
-      <p:sp>
-        <p:nvSpPr>
-          <p:cNvPr id="38" name="Google Shape;38;p6"/>
-          <p:cNvSpPr txBox="1">
-            <a:spLocks noGrp="1"/>
-          </p:cNvSpPr>
-          <p:nvPr>
-            <p:ph type="ftr" idx="11"/>
-          </p:nvPr>
-        </p:nvSpPr>
-        <p:spPr>
-          <a:xfrm>
-            <a:off x="3124200" y="6356350"/>
-            <a:ext cx="2895600" cy="365125"/>
-          </a:xfrm>
-          <a:prstGeom prst="rect">
-            <a:avLst/>
-          </a:prstGeom>
-          <a:noFill/>
-          <a:ln>
-            <a:noFill/>
-          </a:ln>
-        </p:spPr>
-        <p:txBody>
-          <a:bodyPr spcFirstLastPara="1" wrap="square" lIns="91425" tIns="45700" rIns="91425" bIns="45700" anchor="ctr" anchorCtr="0">
-            <a:noAutofit/>
-          </a:bodyPr>
-          <a:lstStyle>
-            <a:lvl1pPr lvl="0" algn="ctr">
-              <a:spcBef>
-                <a:spcPts val="0"/>
-              </a:spcBef>
-              <a:spcAft>
-                <a:spcPts val="0"/>
-              </a:spcAft>
-              <a:buSzPts val="1400"/>
-              <a:buNone/>
-              <a:defRPr/>
-            </a:lvl1pPr>
-            <a:lvl2pPr lvl="1" algn="l">
-              <a:spcBef>
-                <a:spcPts val="0"/>
-              </a:spcBef>
-              <a:spcAft>
-                <a:spcPts val="0"/>
-              </a:spcAft>
-              <a:buSzPts val="1400"/>
-              <a:buNone/>
-              <a:defRPr/>
-            </a:lvl2pPr>
-            <a:lvl3pPr lvl="2" algn="l">
-              <a:spcBef>
-                <a:spcPts val="0"/>
-              </a:spcBef>
-              <a:spcAft>
-                <a:spcPts val="0"/>
-              </a:spcAft>
-              <a:buSzPts val="1400"/>
-              <a:buNone/>
-              <a:defRPr/>
-            </a:lvl3pPr>
-            <a:lvl4pPr lvl="3" algn="l">
-              <a:spcBef>
-                <a:spcPts val="0"/>
-              </a:spcBef>
-              <a:spcAft>
-                <a:spcPts val="0"/>
-              </a:spcAft>
-              <a:buSzPts val="1400"/>
-              <a:buNone/>
-              <a:defRPr/>
-            </a:lvl4pPr>
-            <a:lvl5pPr lvl="4" algn="l">
-              <a:spcBef>
-                <a:spcPts val="0"/>
-              </a:spcBef>
-              <a:spcAft>
-                <a:spcPts val="0"/>
-              </a:spcAft>
-              <a:buSzPts val="1400"/>
-              <a:buNone/>
-              <a:defRPr/>
-            </a:lvl5pPr>
-            <a:lvl6pPr lvl="5" algn="l">
-              <a:spcBef>
-                <a:spcPts val="0"/>
-              </a:spcBef>
-              <a:spcAft>
-                <a:spcPts val="0"/>
-              </a:spcAft>
-              <a:buSzPts val="1400"/>
-              <a:buNone/>
-              <a:defRPr/>
-            </a:lvl6pPr>
-            <a:lvl7pPr lvl="6" algn="l">
-              <a:spcBef>
-                <a:spcPts val="0"/>
-              </a:spcBef>
-              <a:spcAft>
-                <a:spcPts val="0"/>
-              </a:spcAft>
-              <a:buSzPts val="1400"/>
-              <a:buNone/>
-              <a:defRPr/>
-            </a:lvl7pPr>
-            <a:lvl8pPr lvl="7" algn="l">
-              <a:spcBef>
-                <a:spcPts val="0"/>
-              </a:spcBef>
-              <a:spcAft>
-                <a:spcPts val="0"/>
-              </a:spcAft>
-              <a:buSzPts val="1400"/>
-              <a:buNone/>
-              <a:defRPr/>
-            </a:lvl8pPr>
-            <a:lvl9pPr lvl="8" algn="l">
-              <a:spcBef>
-                <a:spcPts val="0"/>
-              </a:spcBef>
-              <a:spcAft>
-                <a:spcPts val="0"/>
-              </a:spcAft>
-              <a:buSzPts val="1400"/>
-              <a:buNone/>
-              <a:defRPr/>
-            </a:lvl9pPr>
-          </a:lstStyle>
-          <a:p>
-            <a:endParaRPr/>
-          </a:p>
-        </p:txBody>
-      </p:sp>
-      <p:sp>
-        <p:nvSpPr>
-          <p:cNvPr id="39" name="Google Shape;39;p6"/>
-          <p:cNvSpPr txBox="1">
-            <a:spLocks noGrp="1"/>
-          </p:cNvSpPr>
-          <p:nvPr>
-            <p:ph type="sldNum" idx="12"/>
-          </p:nvPr>
-        </p:nvSpPr>
-        <p:spPr>
-          <a:xfrm>
-            <a:off x="6553200" y="6356350"/>
-            <a:ext cx="2133600" cy="365125"/>
-          </a:xfrm>
-          <a:prstGeom prst="rect">
-            <a:avLst/>
-          </a:prstGeom>
-          <a:noFill/>
-          <a:ln>
-            <a:noFill/>
-          </a:ln>
-        </p:spPr>
-        <p:txBody>
-          <a:bodyPr spcFirstLastPara="1" wrap="square" lIns="91425" tIns="45700" rIns="91425" bIns="45700" anchor="ctr" anchorCtr="0">
-            <a:noAutofit/>
-          </a:bodyPr>
-          <a:lstStyle>
-            <a:lvl1pPr marL="0" lvl="0" indent="0" algn="r">
-              <a:spcBef>
-                <a:spcPts val="0"/>
-              </a:spcBef>
-              <a:buNone/>
-              <a:defRPr/>
-            </a:lvl1pPr>
-            <a:lvl2pPr marL="0" lvl="1" indent="0" algn="r">
-              <a:spcBef>
-                <a:spcPts val="0"/>
-              </a:spcBef>
-              <a:buNone/>
-              <a:defRPr/>
-            </a:lvl2pPr>
-            <a:lvl3pPr marL="0" lvl="2" indent="0" algn="r">
-              <a:spcBef>
-                <a:spcPts val="0"/>
-              </a:spcBef>
-              <a:buNone/>
-              <a:defRPr/>
-            </a:lvl3pPr>
-            <a:lvl4pPr marL="0" lvl="3" indent="0" algn="r">
-              <a:spcBef>
-                <a:spcPts val="0"/>
-              </a:spcBef>
-              <a:buNone/>
-              <a:defRPr/>
-            </a:lvl4pPr>
-            <a:lvl5pPr marL="0" lvl="4" indent="0" algn="r">
-              <a:spcBef>
-                <a:spcPts val="0"/>
-              </a:spcBef>
-              <a:buNone/>
-              <a:defRPr/>
-            </a:lvl5pPr>
-            <a:lvl6pPr marL="0" lvl="5" indent="0" algn="r">
-              <a:spcBef>
-                <a:spcPts val="0"/>
-              </a:spcBef>
-              <a:buNone/>
-              <a:defRPr/>
-            </a:lvl6pPr>
-            <a:lvl7pPr marL="0" lvl="6" indent="0" algn="r">
-              <a:spcBef>
-                <a:spcPts val="0"/>
-              </a:spcBef>
-              <a:buNone/>
-              <a:defRPr/>
-            </a:lvl7pPr>
-            <a:lvl8pPr marL="0" lvl="7" indent="0" algn="r">
-              <a:spcBef>
-                <a:spcPts val="0"/>
-              </a:spcBef>
-              <a:buNone/>
-              <a:defRPr/>
-            </a:lvl8pPr>
-            <a:lvl9pPr marL="0" lvl="8" indent="0" algn="r">
-              <a:spcBef>
-                <a:spcPts val="0"/>
-              </a:spcBef>
-              <a:buNone/>
-              <a:defRPr/>
-            </a:lvl9pPr>
-          </a:lstStyle>
-          <a:p>
-            <a:pPr marL="0" lvl="0" indent="0" algn="r" rtl="0">
-              <a:spcBef>
-                <a:spcPts val="0"/>
-              </a:spcBef>
-              <a:spcAft>
-                <a:spcPts val="0"/>
-              </a:spcAft>
-              <a:buNone/>
-            </a:pPr>
-            <a:fld id="{00000000-1234-1234-1234-123412341234}" type="slidenum">
-              <a:rPr lang="en-US"/>
-              <a:t>‹#›</a:t>
-            </a:fld>
-            <a:endParaRPr/>
-          </a:p>
-        </p:txBody>
-      </p:sp>
-    </p:spTree>
-  </p:cSld>
-  <p:clrMapOvr>
-    <a:masterClrMapping/>
-  </p:clrMapOvr>
-</p:sldLayout>
-</file>
-
-<file path=ppt/slideLayouts/slideLayout3.xml><?xml version="1.0" encoding="utf-8"?>
 <p:sldLayout xmlns:a="http://schemas.openxmlformats.org/drawingml/2006/main" xmlns:r="http://schemas.openxmlformats.org/officeDocument/2006/relationships" xmlns:p="http://schemas.openxmlformats.org/presentationml/2006/main" matchingName="Comparison" type="twoTxTwoObj">
   <p:cSld name="TWO_OBJECTS_WITH_TEXT">
     <p:spTree>
@@ -5877,7 +5148,7 @@
 </p:sldLayout>
 </file>
 
-<file path=ppt/slideLayouts/slideLayout4.xml><?xml version="1.0" encoding="utf-8"?>
+<file path=ppt/slideLayouts/slideLayout3.xml><?xml version="1.0" encoding="utf-8"?>
 <p:sldLayout xmlns:a="http://schemas.openxmlformats.org/drawingml/2006/main" xmlns:r="http://schemas.openxmlformats.org/officeDocument/2006/relationships" xmlns:p="http://schemas.openxmlformats.org/presentationml/2006/main" matchingName="Title Only" type="titleOnly">
   <p:cSld name="TITLE_ONLY">
     <p:spTree>
@@ -6414,7 +5685,7 @@
 </p:sldLayout>
 </file>
 
-<file path=ppt/slideLayouts/slideLayout5.xml><?xml version="1.0" encoding="utf-8"?>
+<file path=ppt/slideLayouts/slideLayout4.xml><?xml version="1.0" encoding="utf-8"?>
 <p:sldLayout xmlns:a="http://schemas.openxmlformats.org/drawingml/2006/main" xmlns:r="http://schemas.openxmlformats.org/officeDocument/2006/relationships" xmlns:p="http://schemas.openxmlformats.org/presentationml/2006/main" matchingName="Content with Caption" type="objTx">
   <p:cSld name="OBJECT_WITH_CAPTION_TEXT">
     <p:spTree>
@@ -7272,7 +6543,7 @@
 </p:sldLayout>
 </file>
 
-<file path=ppt/slideLayouts/slideLayout6.xml><?xml version="1.0" encoding="utf-8"?>
+<file path=ppt/slideLayouts/slideLayout5.xml><?xml version="1.0" encoding="utf-8"?>
 <p:sldLayout xmlns:a="http://schemas.openxmlformats.org/drawingml/2006/main" xmlns:r="http://schemas.openxmlformats.org/officeDocument/2006/relationships" xmlns:p="http://schemas.openxmlformats.org/presentationml/2006/main" matchingName="Picture with Caption" type="picTx">
   <p:cSld name="PICTURE_WITH_CAPTION_TEXT">
     <p:spTree>
@@ -7994,7 +7265,7 @@
 </p:sldLayout>
 </file>
 
-<file path=ppt/slideLayouts/slideLayout7.xml><?xml version="1.0" encoding="utf-8"?>
+<file path=ppt/slideLayouts/slideLayout6.xml><?xml version="1.0" encoding="utf-8"?>
 <p:sldLayout xmlns:a="http://schemas.openxmlformats.org/drawingml/2006/main" xmlns:r="http://schemas.openxmlformats.org/officeDocument/2006/relationships" xmlns:p="http://schemas.openxmlformats.org/presentationml/2006/main" matchingName="Title and Vertical Text" type="vertTx">
   <p:cSld name="VERTICAL_TEXT">
     <p:spTree>
@@ -8691,7 +7962,7 @@
 </p:sldLayout>
 </file>
 
-<file path=ppt/slideLayouts/slideLayout8.xml><?xml version="1.0" encoding="utf-8"?>
+<file path=ppt/slideLayouts/slideLayout7.xml><?xml version="1.0" encoding="utf-8"?>
 <p:sldLayout xmlns:a="http://schemas.openxmlformats.org/drawingml/2006/main" xmlns:r="http://schemas.openxmlformats.org/officeDocument/2006/relationships" xmlns:p="http://schemas.openxmlformats.org/presentationml/2006/main" matchingName="Vertical Title and Text" type="vertTitleAndTx">
   <p:cSld name="VERTICAL_TITLE_AND_VERTICAL_TEXT">
     <p:spTree>
@@ -10396,13 +9667,12 @@
   <p:clrMap bg1="lt1" tx1="dk1" bg2="dk2" tx2="lt2" accent1="accent1" accent2="accent2" accent3="accent3" accent4="accent4" accent5="accent5" accent6="accent6" hlink="hlink" folHlink="folHlink"/>
   <p:sldLayoutIdLst>
     <p:sldLayoutId id="2147483648" r:id="rId1"/>
-    <p:sldLayoutId id="2147483652" r:id="rId2"/>
-    <p:sldLayoutId id="2147483653" r:id="rId3"/>
-    <p:sldLayoutId id="2147483654" r:id="rId4"/>
-    <p:sldLayoutId id="2147483655" r:id="rId5"/>
-    <p:sldLayoutId id="2147483656" r:id="rId6"/>
-    <p:sldLayoutId id="2147483657" r:id="rId7"/>
-    <p:sldLayoutId id="2147483658" r:id="rId8"/>
+    <p:sldLayoutId id="2147483653" r:id="rId2"/>
+    <p:sldLayoutId id="2147483654" r:id="rId3"/>
+    <p:sldLayoutId id="2147483655" r:id="rId4"/>
+    <p:sldLayoutId id="2147483656" r:id="rId5"/>
+    <p:sldLayoutId id="2147483657" r:id="rId6"/>
+    <p:sldLayoutId id="2147483658" r:id="rId7"/>
   </p:sldLayoutIdLst>
   <p:hf sldNum="0" hdr="0" ftr="0" dt="0"/>
   <p:txStyles>
@@ -12375,7 +11645,7 @@
             <a:pPr algn="ctr"/>
             <a:r>
               <a:rPr lang="en-US" dirty="0"/>
-              <a:t>10 / 25</a:t>
+              <a:t>10 / 26</a:t>
             </a:r>
             <a:endParaRPr lang="el-GR" dirty="0"/>
           </a:p>
@@ -12664,7 +11934,7 @@
             <a:pPr algn="ctr"/>
             <a:r>
               <a:rPr lang="en-US" dirty="0"/>
-              <a:t>11 / 25</a:t>
+              <a:t>11 / 26</a:t>
             </a:r>
             <a:endParaRPr lang="el-GR" dirty="0"/>
           </a:p>
@@ -12947,7 +12217,7 @@
             <a:pPr algn="ctr"/>
             <a:r>
               <a:rPr lang="en-US" dirty="0"/>
-              <a:t>12 / 25</a:t>
+              <a:t>12 / 26</a:t>
             </a:r>
             <a:endParaRPr lang="el-GR" dirty="0"/>
           </a:p>
@@ -13967,7 +13237,7 @@
             <a:pPr algn="ctr"/>
             <a:r>
               <a:rPr lang="en-US" dirty="0"/>
-              <a:t>13 / 25</a:t>
+              <a:t>13 / 26</a:t>
             </a:r>
             <a:endParaRPr lang="el-GR" dirty="0"/>
           </a:p>
@@ -14945,7 +14215,7 @@
             <a:pPr algn="ctr"/>
             <a:r>
               <a:rPr lang="en-US" dirty="0"/>
-              <a:t>14 / 25</a:t>
+              <a:t>14 / 26</a:t>
             </a:r>
             <a:endParaRPr lang="el-GR" dirty="0"/>
           </a:p>
@@ -16097,7 +15367,7 @@
             <a:pPr algn="ctr"/>
             <a:r>
               <a:rPr lang="en-US" dirty="0"/>
-              <a:t>15 / 25</a:t>
+              <a:t>15 / 26</a:t>
             </a:r>
             <a:endParaRPr lang="el-GR" dirty="0"/>
           </a:p>
@@ -16465,7 +15735,7 @@
             <a:pPr algn="ctr"/>
             <a:r>
               <a:rPr lang="en-US" dirty="0"/>
-              <a:t>16 / 25</a:t>
+              <a:t>16 / 26</a:t>
             </a:r>
             <a:endParaRPr lang="el-GR" dirty="0"/>
           </a:p>
@@ -16828,7 +16098,7 @@
             <a:pPr algn="ctr"/>
             <a:r>
               <a:rPr lang="en-US" dirty="0"/>
-              <a:t>17 / 25</a:t>
+              <a:t>17 / 26</a:t>
             </a:r>
             <a:endParaRPr lang="el-GR" dirty="0"/>
           </a:p>
@@ -17185,7 +16455,7 @@
             <a:pPr algn="ctr"/>
             <a:r>
               <a:rPr lang="en-US" dirty="0"/>
-              <a:t>18 / 25</a:t>
+              <a:t>18 / 26</a:t>
             </a:r>
             <a:endParaRPr lang="el-GR" dirty="0"/>
           </a:p>
@@ -17260,7 +16530,7 @@
         <p:spPr>
           <a:xfrm>
             <a:off x="571500" y="476250"/>
-            <a:ext cx="11601450" cy="647700"/>
+            <a:ext cx="11601450" cy="507831"/>
           </a:xfrm>
           <a:prstGeom prst="rect">
             <a:avLst/>
@@ -17286,18 +16556,44 @@
               <a:buNone/>
             </a:pPr>
             <a:r>
-              <a:rPr lang="en-US" sz="3300" b="1" i="0" u="none" strike="noStrike" cap="none">
+              <a:rPr lang="en-US" sz="3300" b="1" i="0" u="none" strike="noStrike" cap="none" dirty="0">
                 <a:solidFill>
                   <a:srgbClr val="005088"/>
                 </a:solidFill>
-                <a:latin typeface="Poppins"/>
+                <a:latin typeface="+mn-lt"/>
                 <a:ea typeface="Poppins"/>
                 <a:cs typeface="Poppins"/>
                 <a:sym typeface="Poppins"/>
               </a:rPr>
-              <a:t>Αποτελέσματα: NSL-KDD (2/2)</a:t>
-            </a:r>
-            <a:endParaRPr/>
+              <a:t>Απ</a:t>
+            </a:r>
+            <a:r>
+              <a:rPr lang="en-US" sz="3300" b="1" i="0" u="none" strike="noStrike" cap="none" dirty="0" err="1">
+                <a:solidFill>
+                  <a:srgbClr val="005088"/>
+                </a:solidFill>
+                <a:latin typeface="+mn-lt"/>
+                <a:ea typeface="Poppins"/>
+                <a:cs typeface="Poppins"/>
+                <a:sym typeface="Poppins"/>
+              </a:rPr>
+              <a:t>οτελέσμ</a:t>
+            </a:r>
+            <a:r>
+              <a:rPr lang="en-US" sz="3300" b="1" i="0" u="none" strike="noStrike" cap="none" dirty="0">
+                <a:solidFill>
+                  <a:srgbClr val="005088"/>
+                </a:solidFill>
+                <a:latin typeface="+mn-lt"/>
+                <a:ea typeface="Poppins"/>
+                <a:cs typeface="Poppins"/>
+                <a:sym typeface="Poppins"/>
+              </a:rPr>
+              <a:t>ατα: NSL-KDD (2/2)</a:t>
+            </a:r>
+            <a:endParaRPr dirty="0">
+              <a:latin typeface="+mn-lt"/>
+            </a:endParaRPr>
           </a:p>
         </p:txBody>
       </p:sp>
@@ -17542,7 +16838,7 @@
             <a:pPr algn="ctr"/>
             <a:r>
               <a:rPr lang="en-US" dirty="0"/>
-              <a:t>19 / 25</a:t>
+              <a:t>19 / 26</a:t>
             </a:r>
             <a:endParaRPr lang="el-GR" dirty="0"/>
           </a:p>
@@ -17596,7 +16892,7 @@
         </p:blipFill>
         <p:spPr>
           <a:xfrm>
-            <a:off x="-19050" y="0"/>
+            <a:off x="0" y="0"/>
             <a:ext cx="12192000" cy="6858000"/>
           </a:xfrm>
           <a:prstGeom prst="rect">
@@ -17623,8 +16919,8 @@
         </p:blipFill>
         <p:spPr>
           <a:xfrm>
-            <a:off x="6372225" y="1470937"/>
-            <a:ext cx="5334000" cy="4074538"/>
+            <a:off x="6372225" y="1504278"/>
+            <a:ext cx="5334000" cy="3499522"/>
           </a:xfrm>
           <a:prstGeom prst="rect">
             <a:avLst/>
@@ -17759,33 +17055,6 @@
           </a:p>
         </p:txBody>
       </p:sp>
-      <p:pic>
-        <p:nvPicPr>
-          <p:cNvPr id="100" name="Google Shape;100;p14" descr="image.png"/>
-          <p:cNvPicPr preferRelativeResize="0"/>
-          <p:nvPr/>
-        </p:nvPicPr>
-        <p:blipFill rotWithShape="1">
-          <a:blip r:embed="rId5">
-            <a:alphaModFix/>
-          </a:blip>
-          <a:srcRect/>
-          <a:stretch/>
-        </p:blipFill>
-        <p:spPr>
-          <a:xfrm>
-            <a:off x="8801099" y="1729662"/>
-            <a:ext cx="476250" cy="476250"/>
-          </a:xfrm>
-          <a:prstGeom prst="rect">
-            <a:avLst/>
-          </a:prstGeom>
-          <a:noFill/>
-          <a:ln>
-            <a:noFill/>
-          </a:ln>
-        </p:spPr>
-      </p:pic>
       <p:sp>
         <p:nvSpPr>
           <p:cNvPr id="101" name="Google Shape;101;p14"/>
@@ -17794,8 +17063,8 @@
         </p:nvSpPr>
         <p:spPr>
           <a:xfrm>
-            <a:off x="6538911" y="2336241"/>
-            <a:ext cx="5000625" cy="276999"/>
+            <a:off x="6821577" y="1914567"/>
+            <a:ext cx="2503489" cy="276999"/>
           </a:xfrm>
           <a:prstGeom prst="rect">
             <a:avLst/>
@@ -17821,7 +17090,7 @@
               <a:buNone/>
             </a:pPr>
             <a:r>
-              <a:rPr lang="en-US" sz="1800" b="1" i="0" u="none" strike="noStrike" cap="none" dirty="0" err="1">
+              <a:rPr lang="el-GR" sz="1800" b="1" i="0" u="none" strike="noStrike" cap="none" dirty="0">
                 <a:solidFill>
                   <a:srgbClr val="0F172A"/>
                 </a:solidFill>
@@ -17830,43 +17099,7 @@
                 <a:cs typeface="Poppins"/>
                 <a:sym typeface="Poppins"/>
               </a:rPr>
-              <a:t>Κύριος</a:t>
-            </a:r>
-            <a:r>
-              <a:rPr lang="en-US" sz="1800" b="1" i="0" u="none" strike="noStrike" cap="none" dirty="0">
-                <a:solidFill>
-                  <a:srgbClr val="0F172A"/>
-                </a:solidFill>
-                <a:latin typeface="+mn-lt"/>
-                <a:ea typeface="Poppins"/>
-                <a:cs typeface="Poppins"/>
-                <a:sym typeface="Poppins"/>
-              </a:rPr>
-              <a:t> </a:t>
-            </a:r>
-            <a:r>
-              <a:rPr lang="en-US" sz="1800" b="1" i="0" u="none" strike="noStrike" cap="none" dirty="0" err="1">
-                <a:solidFill>
-                  <a:srgbClr val="0F172A"/>
-                </a:solidFill>
-                <a:latin typeface="+mn-lt"/>
-                <a:ea typeface="Poppins"/>
-                <a:cs typeface="Poppins"/>
-                <a:sym typeface="Poppins"/>
-              </a:rPr>
-              <a:t>Στόχος</a:t>
-            </a:r>
-            <a:r>
-              <a:rPr lang="el-GR" sz="1800" b="1" i="0" u="none" strike="noStrike" cap="none" dirty="0">
-                <a:solidFill>
-                  <a:srgbClr val="0F172A"/>
-                </a:solidFill>
-                <a:latin typeface="+mn-lt"/>
-                <a:ea typeface="Poppins"/>
-                <a:cs typeface="Poppins"/>
-                <a:sym typeface="Poppins"/>
-              </a:rPr>
-              <a:t> και Προτεινόμενη Λύση</a:t>
+              <a:t>Η Απάντηση</a:t>
             </a:r>
             <a:endParaRPr sz="1800" dirty="0">
               <a:latin typeface="+mn-lt"/>
@@ -17882,8 +17115,8 @@
         </p:nvSpPr>
         <p:spPr>
           <a:xfrm>
-            <a:off x="6700837" y="2864977"/>
-            <a:ext cx="4762500" cy="1551194"/>
+            <a:off x="6461125" y="2673894"/>
+            <a:ext cx="4762500" cy="1938992"/>
           </a:xfrm>
           <a:prstGeom prst="rect">
             <a:avLst/>
@@ -17913,6 +17146,78 @@
               <a:buChar char="•"/>
             </a:pPr>
             <a:r>
+              <a:rPr lang="en-US" sz="1800" b="1" i="0" u="none" strike="noStrike" cap="none" dirty="0" err="1">
+                <a:solidFill>
+                  <a:schemeClr val="tx1"/>
+                </a:solidFill>
+                <a:latin typeface="+mn-lt"/>
+                <a:ea typeface="Lato"/>
+                <a:cs typeface="Lato"/>
+                <a:sym typeface="Lato"/>
+              </a:rPr>
+              <a:t>Βελτίωση</a:t>
+            </a:r>
+            <a:r>
+              <a:rPr lang="en-US" sz="1800" b="1" i="0" u="none" strike="noStrike" cap="none" dirty="0">
+                <a:solidFill>
+                  <a:schemeClr val="tx1"/>
+                </a:solidFill>
+                <a:latin typeface="+mn-lt"/>
+                <a:ea typeface="Lato"/>
+                <a:cs typeface="Lato"/>
+                <a:sym typeface="Lato"/>
+              </a:rPr>
+              <a:t> </a:t>
+            </a:r>
+            <a:r>
+              <a:rPr lang="el-GR" sz="1800" b="1" dirty="0">
+                <a:solidFill>
+                  <a:schemeClr val="tx1"/>
+                </a:solidFill>
+                <a:latin typeface="+mn-lt"/>
+                <a:ea typeface="Lato"/>
+                <a:cs typeface="Lato"/>
+                <a:sym typeface="Lato"/>
+              </a:rPr>
+              <a:t>Α</a:t>
+            </a:r>
+            <a:r>
+              <a:rPr lang="en-US" sz="1800" b="1" i="0" u="none" strike="noStrike" cap="none" dirty="0">
+                <a:solidFill>
+                  <a:schemeClr val="tx1"/>
+                </a:solidFill>
+                <a:latin typeface="+mn-lt"/>
+                <a:ea typeface="Lato"/>
+                <a:cs typeface="Lato"/>
+                <a:sym typeface="Lato"/>
+              </a:rPr>
+              <a:t>π</a:t>
+            </a:r>
+            <a:r>
+              <a:rPr lang="en-US" sz="1800" b="1" i="0" u="none" strike="noStrike" cap="none" dirty="0" err="1">
+                <a:solidFill>
+                  <a:schemeClr val="tx1"/>
+                </a:solidFill>
+                <a:latin typeface="+mn-lt"/>
+                <a:ea typeface="Lato"/>
+                <a:cs typeface="Lato"/>
+                <a:sym typeface="Lato"/>
+              </a:rPr>
+              <a:t>όδοσης</a:t>
+            </a:r>
+            <a:r>
+              <a:rPr lang="en-US" sz="1800" b="1" i="0" u="none" strike="noStrike" cap="none" dirty="0">
+                <a:solidFill>
+                  <a:schemeClr val="tx1"/>
+                </a:solidFill>
+                <a:latin typeface="+mn-lt"/>
+                <a:ea typeface="Lato"/>
+                <a:cs typeface="Lato"/>
+                <a:sym typeface="Lato"/>
+              </a:rPr>
+              <a:t> </a:t>
+            </a:r>
+            <a:r>
               <a:rPr lang="en-US" sz="1800" b="0" i="0" u="none" strike="noStrike" cap="none" dirty="0" err="1">
                 <a:solidFill>
                   <a:schemeClr val="tx1"/>
@@ -17922,7 +17227,7 @@
                 <a:cs typeface="Lato"/>
                 <a:sym typeface="Lato"/>
               </a:rPr>
-              <a:t>Βελτίωση</a:t>
+              <a:t>χωρίς</a:t>
             </a:r>
             <a:r>
               <a:rPr lang="en-US" sz="1800" b="0" i="0" u="none" strike="noStrike" cap="none" dirty="0">
@@ -17934,10 +17239,34 @@
                 <a:cs typeface="Lato"/>
                 <a:sym typeface="Lato"/>
               </a:rPr>
+              <a:t> παραβία</a:t>
+            </a:r>
+            <a:r>
+              <a:rPr lang="en-US" sz="1800" b="0" i="0" u="none" strike="noStrike" cap="none" dirty="0" err="1">
+                <a:solidFill>
+                  <a:schemeClr val="tx1"/>
+                </a:solidFill>
+                <a:latin typeface="+mn-lt"/>
+                <a:ea typeface="Lato"/>
+                <a:cs typeface="Lato"/>
+                <a:sym typeface="Lato"/>
+              </a:rPr>
+              <a:t>ση</a:t>
+            </a:r>
+            <a:r>
+              <a:rPr lang="en-US" sz="1800" b="0" i="0" u="none" strike="noStrike" cap="none" dirty="0">
+                <a:solidFill>
+                  <a:schemeClr val="tx1"/>
+                </a:solidFill>
+                <a:latin typeface="+mn-lt"/>
+                <a:ea typeface="Lato"/>
+                <a:cs typeface="Lato"/>
+                <a:sym typeface="Lato"/>
+              </a:rPr>
               <a:t> </a:t>
             </a:r>
             <a:r>
-              <a:rPr lang="en-US" sz="1800" b="0" i="0" u="none" strike="noStrike" cap="none" dirty="0" err="1">
+              <a:rPr lang="el-GR" sz="1800" b="1" i="0" u="none" strike="noStrike" cap="none" dirty="0">
                 <a:solidFill>
                   <a:schemeClr val="tx1"/>
                 </a:solidFill>
@@ -17946,10 +17275,10 @@
                 <a:cs typeface="Lato"/>
                 <a:sym typeface="Lato"/>
               </a:rPr>
-              <a:t>της</a:t>
-            </a:r>
-            <a:r>
-              <a:rPr lang="en-US" sz="1800" b="0" i="0" u="none" strike="noStrike" cap="none" dirty="0">
+              <a:t>Ι</a:t>
+            </a:r>
+            <a:r>
+              <a:rPr lang="en-US" sz="1800" b="1" i="0" u="none" strike="noStrike" cap="none" dirty="0" err="1">
                 <a:solidFill>
                   <a:schemeClr val="tx1"/>
                 </a:solidFill>
@@ -17958,10 +17287,10 @@
                 <a:cs typeface="Lato"/>
                 <a:sym typeface="Lato"/>
               </a:rPr>
-              <a:t> </a:t>
-            </a:r>
-            <a:r>
-              <a:rPr lang="el-GR" sz="1800" dirty="0">
+              <a:t>διωτικότητ</a:t>
+            </a:r>
+            <a:r>
+              <a:rPr lang="en-US" sz="1800" b="1" i="0" u="none" strike="noStrike" cap="none" dirty="0">
                 <a:solidFill>
                   <a:schemeClr val="tx1"/>
                 </a:solidFill>
@@ -17970,225 +17299,9 @@
                 <a:cs typeface="Lato"/>
                 <a:sym typeface="Lato"/>
               </a:rPr>
-              <a:t>Α</a:t>
-            </a:r>
-            <a:r>
-              <a:rPr lang="en-US" sz="1800" b="0" i="0" u="none" strike="noStrike" cap="none" dirty="0">
-                <a:solidFill>
-                  <a:schemeClr val="tx1"/>
-                </a:solidFill>
-                <a:latin typeface="+mn-lt"/>
-                <a:ea typeface="Lato"/>
-                <a:cs typeface="Lato"/>
-                <a:sym typeface="Lato"/>
-              </a:rPr>
-              <a:t>π</a:t>
-            </a:r>
-            <a:r>
-              <a:rPr lang="en-US" sz="1800" b="0" i="0" u="none" strike="noStrike" cap="none" dirty="0" err="1">
-                <a:solidFill>
-                  <a:schemeClr val="tx1"/>
-                </a:solidFill>
-                <a:latin typeface="+mn-lt"/>
-                <a:ea typeface="Lato"/>
-                <a:cs typeface="Lato"/>
-                <a:sym typeface="Lato"/>
-              </a:rPr>
-              <a:t>όδοσης</a:t>
-            </a:r>
-            <a:r>
-              <a:rPr lang="en-US" sz="1800" b="0" i="0" u="none" strike="noStrike" cap="none" dirty="0">
-                <a:solidFill>
-                  <a:schemeClr val="tx1"/>
-                </a:solidFill>
-                <a:latin typeface="+mn-lt"/>
-                <a:ea typeface="Lato"/>
-                <a:cs typeface="Lato"/>
-                <a:sym typeface="Lato"/>
-              </a:rPr>
-              <a:t> </a:t>
-            </a:r>
-            <a:r>
-              <a:rPr lang="en-US" sz="1800" b="0" i="0" u="none" strike="noStrike" cap="none" dirty="0" err="1">
-                <a:solidFill>
-                  <a:schemeClr val="tx1"/>
-                </a:solidFill>
-                <a:latin typeface="+mn-lt"/>
-                <a:ea typeface="Lato"/>
-                <a:cs typeface="Lato"/>
-                <a:sym typeface="Lato"/>
-              </a:rPr>
-              <a:t>χωρίς</a:t>
-            </a:r>
-            <a:r>
-              <a:rPr lang="en-US" sz="1800" b="0" i="0" u="none" strike="noStrike" cap="none" dirty="0">
-                <a:solidFill>
-                  <a:schemeClr val="tx1"/>
-                </a:solidFill>
-                <a:latin typeface="+mn-lt"/>
-                <a:ea typeface="Lato"/>
-                <a:cs typeface="Lato"/>
-                <a:sym typeface="Lato"/>
-              </a:rPr>
-              <a:t> παραβία</a:t>
-            </a:r>
-            <a:r>
-              <a:rPr lang="en-US" sz="1800" b="0" i="0" u="none" strike="noStrike" cap="none" dirty="0" err="1">
-                <a:solidFill>
-                  <a:schemeClr val="tx1"/>
-                </a:solidFill>
-                <a:latin typeface="+mn-lt"/>
-                <a:ea typeface="Lato"/>
-                <a:cs typeface="Lato"/>
-                <a:sym typeface="Lato"/>
-              </a:rPr>
-              <a:t>ση</a:t>
-            </a:r>
-            <a:r>
-              <a:rPr lang="en-US" sz="1800" b="0" i="0" u="none" strike="noStrike" cap="none" dirty="0">
-                <a:solidFill>
-                  <a:schemeClr val="tx1"/>
-                </a:solidFill>
-                <a:latin typeface="+mn-lt"/>
-                <a:ea typeface="Lato"/>
-                <a:cs typeface="Lato"/>
-                <a:sym typeface="Lato"/>
-              </a:rPr>
-              <a:t> </a:t>
-            </a:r>
-            <a:r>
-              <a:rPr lang="en-US" sz="1800" b="0" i="0" u="none" strike="noStrike" cap="none" dirty="0" err="1">
-                <a:solidFill>
-                  <a:schemeClr val="tx1"/>
-                </a:solidFill>
-                <a:latin typeface="+mn-lt"/>
-                <a:ea typeface="Lato"/>
-                <a:cs typeface="Lato"/>
-                <a:sym typeface="Lato"/>
-              </a:rPr>
-              <a:t>της</a:t>
-            </a:r>
-            <a:r>
-              <a:rPr lang="en-US" sz="1800" b="0" i="0" u="none" strike="noStrike" cap="none" dirty="0">
-                <a:solidFill>
-                  <a:schemeClr val="tx1"/>
-                </a:solidFill>
-                <a:latin typeface="+mn-lt"/>
-                <a:ea typeface="Lato"/>
-                <a:cs typeface="Lato"/>
-                <a:sym typeface="Lato"/>
-              </a:rPr>
-              <a:t> </a:t>
-            </a:r>
-            <a:r>
-              <a:rPr lang="el-GR" sz="1800" b="0" i="0" u="none" strike="noStrike" cap="none" dirty="0">
-                <a:solidFill>
-                  <a:schemeClr val="tx1"/>
-                </a:solidFill>
-                <a:latin typeface="+mn-lt"/>
-                <a:ea typeface="Lato"/>
-                <a:cs typeface="Lato"/>
-                <a:sym typeface="Lato"/>
-              </a:rPr>
-              <a:t>Ι</a:t>
-            </a:r>
-            <a:r>
-              <a:rPr lang="en-US" sz="1800" b="0" i="0" u="none" strike="noStrike" cap="none" dirty="0" err="1">
-                <a:solidFill>
-                  <a:schemeClr val="tx1"/>
-                </a:solidFill>
-                <a:latin typeface="+mn-lt"/>
-                <a:ea typeface="Lato"/>
-                <a:cs typeface="Lato"/>
-                <a:sym typeface="Lato"/>
-              </a:rPr>
-              <a:t>διωτικότητ</a:t>
-            </a:r>
-            <a:r>
-              <a:rPr lang="en-US" sz="1800" b="0" i="0" u="none" strike="noStrike" cap="none" dirty="0">
-                <a:solidFill>
-                  <a:schemeClr val="tx1"/>
-                </a:solidFill>
-                <a:latin typeface="+mn-lt"/>
-                <a:ea typeface="Lato"/>
-                <a:cs typeface="Lato"/>
-                <a:sym typeface="Lato"/>
-              </a:rPr>
-              <a:t>ας των </a:t>
-            </a:r>
-            <a:r>
-              <a:rPr lang="el-GR" sz="1800" b="0" i="0" u="none" strike="noStrike" cap="none" dirty="0">
-                <a:solidFill>
-                  <a:schemeClr val="tx1"/>
-                </a:solidFill>
-                <a:latin typeface="+mn-lt"/>
-                <a:ea typeface="Lato"/>
-                <a:cs typeface="Lato"/>
-                <a:sym typeface="Lato"/>
-              </a:rPr>
-              <a:t>Π</a:t>
-            </a:r>
-            <a:r>
-              <a:rPr lang="en-US" sz="1800" b="0" i="0" u="none" strike="noStrike" cap="none" dirty="0" err="1">
-                <a:solidFill>
-                  <a:schemeClr val="tx1"/>
-                </a:solidFill>
-                <a:latin typeface="+mn-lt"/>
-                <a:ea typeface="Lato"/>
-                <a:cs typeface="Lato"/>
-                <a:sym typeface="Lato"/>
-              </a:rPr>
-              <a:t>ρωτογενών</a:t>
-            </a:r>
-            <a:r>
-              <a:rPr lang="en-US" sz="1800" b="0" i="0" u="none" strike="noStrike" cap="none" dirty="0">
-                <a:solidFill>
-                  <a:schemeClr val="tx1"/>
-                </a:solidFill>
-                <a:latin typeface="+mn-lt"/>
-                <a:ea typeface="Lato"/>
-                <a:cs typeface="Lato"/>
-                <a:sym typeface="Lato"/>
-              </a:rPr>
-              <a:t> </a:t>
-            </a:r>
-            <a:r>
-              <a:rPr lang="el-GR" sz="1800" dirty="0">
-                <a:solidFill>
-                  <a:schemeClr val="tx1"/>
-                </a:solidFill>
-                <a:latin typeface="+mn-lt"/>
-                <a:ea typeface="Lato"/>
-                <a:cs typeface="Lato"/>
-                <a:sym typeface="Lato"/>
-              </a:rPr>
-              <a:t>Δ</a:t>
-            </a:r>
-            <a:r>
-              <a:rPr lang="en-US" sz="1800" b="0" i="0" u="none" strike="noStrike" cap="none" dirty="0" err="1">
-                <a:solidFill>
-                  <a:schemeClr val="tx1"/>
-                </a:solidFill>
-                <a:latin typeface="+mn-lt"/>
-                <a:ea typeface="Lato"/>
-                <a:cs typeface="Lato"/>
-                <a:sym typeface="Lato"/>
-              </a:rPr>
-              <a:t>εδομένων</a:t>
-            </a:r>
-            <a:r>
-              <a:rPr lang="en-US" sz="1800" b="0" i="0" u="none" strike="noStrike" cap="none" dirty="0">
-                <a:solidFill>
-                  <a:schemeClr val="tx1"/>
-                </a:solidFill>
-                <a:latin typeface="+mn-lt"/>
-                <a:ea typeface="Lato"/>
-                <a:cs typeface="Lato"/>
-                <a:sym typeface="Lato"/>
-              </a:rPr>
-              <a:t>.</a:t>
-            </a:r>
-            <a:endParaRPr lang="el-GR" sz="1800" b="0" i="0" u="none" strike="noStrike" cap="none" dirty="0">
+              <a:t>ας </a:t>
+            </a:r>
+            <a:endParaRPr lang="el-GR" sz="1800" b="1" dirty="0">
               <a:solidFill>
                 <a:schemeClr val="tx1"/>
               </a:solidFill>
@@ -18212,6 +17325,30 @@
               <a:buFont typeface="Arial" panose="020B0604020202020204" pitchFamily="34" charset="0"/>
               <a:buChar char="•"/>
             </a:pPr>
+            <a:endParaRPr lang="el-GR" sz="1800" dirty="0">
+              <a:solidFill>
+                <a:schemeClr val="tx1"/>
+              </a:solidFill>
+              <a:latin typeface="+mn-lt"/>
+              <a:ea typeface="Lato"/>
+              <a:cs typeface="Lato"/>
+              <a:sym typeface="Lato"/>
+            </a:endParaRPr>
+          </a:p>
+          <a:p>
+            <a:pPr marL="285750" marR="0" lvl="0" indent="-285750" rtl="0">
+              <a:lnSpc>
+                <a:spcPct val="140000"/>
+              </a:lnSpc>
+              <a:spcBef>
+                <a:spcPts val="0"/>
+              </a:spcBef>
+              <a:spcAft>
+                <a:spcPts val="0"/>
+              </a:spcAft>
+              <a:buFont typeface="Arial" panose="020B0604020202020204" pitchFamily="34" charset="0"/>
+              <a:buChar char="•"/>
+            </a:pPr>
             <a:r>
               <a:rPr lang="el-GR" sz="1800" dirty="0">
                 <a:solidFill>
@@ -18222,10 +17359,10 @@
                 <a:cs typeface="Lato"/>
                 <a:sym typeface="Lato"/>
               </a:rPr>
-              <a:t>Πλαίσιο </a:t>
-            </a:r>
-            <a:r>
-              <a:rPr lang="en-US" sz="1800" dirty="0" err="1">
+              <a:t>Ανάπτυξη και Αξιολόγηση του Καινοτόμου Πλαισίου </a:t>
+            </a:r>
+            <a:r>
+              <a:rPr lang="en-US" sz="1800" b="1" dirty="0" err="1">
                 <a:solidFill>
                   <a:schemeClr val="tx1"/>
                 </a:solidFill>
@@ -18326,7 +17463,7 @@
         <p:spPr>
           <a:xfrm>
             <a:off x="310169" y="1532066"/>
-            <a:ext cx="5352037" cy="3953888"/>
+            <a:ext cx="5352037" cy="3471734"/>
           </a:xfrm>
           <a:prstGeom prst="roundRect">
             <a:avLst>
@@ -18334,10 +17471,7 @@
             </a:avLst>
           </a:prstGeom>
           <a:solidFill>
-            <a:schemeClr val="accent6">
-              <a:lumMod val="20000"/>
-              <a:lumOff val="80000"/>
-            </a:schemeClr>
+            <a:srgbClr val="FEF6F0"/>
           </a:solidFill>
           <a:ln>
             <a:noFill/>
@@ -18386,7 +17520,7 @@
           <a:blip>
             <a:extLst>
               <a:ext uri="{96DAC541-7B7A-43D3-8B79-37D633B846F1}">
-                <asvg:svgBlip xmlns:asvg="http://schemas.microsoft.com/office/drawing/2016/SVG/main" r:embed="rId6"/>
+                <asvg:svgBlip xmlns:asvg="http://schemas.microsoft.com/office/drawing/2016/SVG/main" r:embed="rId5"/>
               </a:ext>
             </a:extLst>
           </a:blip>
@@ -18396,8 +17530,8 @@
         </p:blipFill>
         <p:spPr>
           <a:xfrm>
-            <a:off x="2707225" y="1647989"/>
-            <a:ext cx="557923" cy="557923"/>
+            <a:off x="690473" y="1862262"/>
+            <a:ext cx="445856" cy="445856"/>
           </a:xfrm>
           <a:prstGeom prst="rect">
             <a:avLst/>
@@ -18418,7 +17552,7 @@
         </p:nvSpPr>
         <p:spPr>
           <a:xfrm>
-            <a:off x="319188" y="2884438"/>
+            <a:off x="319188" y="2543237"/>
             <a:ext cx="5352037" cy="2308324"/>
           </a:xfrm>
           <a:prstGeom prst="rect">
@@ -18437,8 +17571,20 @@
               <a:buChar char="•"/>
             </a:pPr>
             <a:r>
+              <a:rPr lang="el-GR" sz="1800" b="1" dirty="0"/>
+              <a:t>Ανισορροπία Κλάσεων</a:t>
+            </a:r>
+            <a:r>
+              <a:rPr lang="en-US" sz="1800" b="1" dirty="0"/>
+              <a:t>:</a:t>
+            </a:r>
+            <a:r>
+              <a:rPr lang="el-GR" sz="1800" b="1" dirty="0"/>
+              <a:t> </a:t>
+            </a:r>
+            <a:r>
               <a:rPr lang="el-GR" sz="1800" dirty="0"/>
-              <a:t>Η Στατιστική Ετερογένεια και η Ανισορροπία Κλάσεων υποβαθμίζουν τα Ομοσπονδιακά Μοντέλα</a:t>
+              <a:t>Υποβάθμιση Ομοσπονδιακών Συστημάτων</a:t>
             </a:r>
           </a:p>
           <a:p>
@@ -18446,10 +17592,7 @@
               <a:buFont typeface="Arial" panose="020B0604020202020204" pitchFamily="34" charset="0"/>
               <a:buChar char="•"/>
             </a:pPr>
-            <a:r>
-              <a:rPr lang="el-GR" sz="1800" dirty="0"/>
-              <a:t>Η Μειοψηφική Κλάση αποτελεί την Κλάση Ενδιαφέροντος</a:t>
-            </a:r>
+            <a:endParaRPr lang="el-GR" sz="1800" dirty="0"/>
           </a:p>
           <a:p>
             <a:pPr marL="285750" indent="-285750">
@@ -18458,16 +17601,38 @@
             </a:pPr>
             <a:r>
               <a:rPr lang="el-GR" sz="1800" dirty="0"/>
-              <a:t>Οι κλασικές Τεχνικές </a:t>
+              <a:t>Σπανιότητα Κλάσης Ενδιαφέροντος</a:t>
+            </a:r>
+          </a:p>
+          <a:p>
+            <a:pPr marL="285750" indent="-285750">
+              <a:buFont typeface="Arial" panose="020B0604020202020204" pitchFamily="34" charset="0"/>
+              <a:buChar char="•"/>
+            </a:pPr>
+            <a:endParaRPr lang="el-GR" sz="1800" dirty="0"/>
+          </a:p>
+          <a:p>
+            <a:pPr marL="285750" indent="-285750">
+              <a:buFont typeface="Arial" panose="020B0604020202020204" pitchFamily="34" charset="0"/>
+              <a:buChar char="•"/>
+            </a:pPr>
+            <a:r>
+              <a:rPr lang="el-GR" sz="1800" b="1" dirty="0"/>
+              <a:t>Περιορισμός Ομοσπονδιακής Μάθησης</a:t>
+            </a:r>
+            <a:r>
+              <a:rPr lang="en-US" sz="1800" b="1" dirty="0"/>
+              <a:t>: </a:t>
+            </a:r>
+            <a:r>
+              <a:rPr lang="el-GR" sz="1800" dirty="0"/>
+              <a:t>Αδυναμία Μεταφοράς Τεχνικών </a:t>
             </a:r>
             <a:r>
               <a:rPr lang="el-GR" sz="1800" dirty="0" err="1"/>
               <a:t>Υπερδειγματοληψίας</a:t>
             </a:r>
-            <a:r>
-              <a:rPr lang="el-GR" sz="1800" dirty="0"/>
-              <a:t> δεν μπορούν να μεταφερθούν αυτούσιες σε Ομοσπονδιακό Περιβάλλον</a:t>
-            </a:r>
+            <a:endParaRPr lang="el-GR" sz="1800" dirty="0"/>
           </a:p>
         </p:txBody>
       </p:sp>
@@ -18485,7 +17650,7 @@
         </p:nvSpPr>
         <p:spPr>
           <a:xfrm>
-            <a:off x="1941611" y="2243908"/>
+            <a:off x="1221613" y="1921949"/>
             <a:ext cx="2089150" cy="369332"/>
           </a:xfrm>
           <a:prstGeom prst="rect">
@@ -18501,7 +17666,7 @@
           <a:p>
             <a:r>
               <a:rPr lang="el-GR" sz="1800" b="1" dirty="0"/>
-              <a:t>Κύριο Πρόβλημα</a:t>
+              <a:t>Η Πρόκληση</a:t>
             </a:r>
           </a:p>
         </p:txBody>
@@ -18560,12 +17725,48 @@
             <a:pPr algn="ctr"/>
             <a:r>
               <a:rPr lang="en-US" dirty="0"/>
-              <a:t>2 / 25</a:t>
+              <a:t>2 / 26</a:t>
             </a:r>
             <a:endParaRPr lang="el-GR" dirty="0"/>
           </a:p>
         </p:txBody>
       </p:sp>
+      <p:pic>
+        <p:nvPicPr>
+          <p:cNvPr id="4" name="Γραφικό 3" descr="Ασπίδα με σημείο επιλογής με συμπαγές γέμισμα">
+            <a:extLst>
+              <a:ext uri="{FF2B5EF4-FFF2-40B4-BE49-F238E27FC236}">
+                <a16:creationId xmlns:a16="http://schemas.microsoft.com/office/drawing/2014/main" id="{3C7545C1-3820-BCAC-ACD9-BDB76AA7F984}"/>
+              </a:ext>
+            </a:extLst>
+          </p:cNvPr>
+          <p:cNvPicPr>
+            <a:picLocks noChangeAspect="1"/>
+          </p:cNvPicPr>
+          <p:nvPr/>
+        </p:nvPicPr>
+        <p:blipFill>
+          <a:blip>
+            <a:extLst>
+              <a:ext uri="{96DAC541-7B7A-43D3-8B79-37D633B846F1}">
+                <asvg:svgBlip xmlns:asvg="http://schemas.microsoft.com/office/drawing/2016/SVG/main" r:embed="rId6"/>
+              </a:ext>
+            </a:extLst>
+          </a:blip>
+          <a:stretch>
+            <a:fillRect/>
+          </a:stretch>
+        </p:blipFill>
+        <p:spPr>
+          <a:xfrm>
+            <a:off x="6706226" y="1798017"/>
+            <a:ext cx="510101" cy="510101"/>
+          </a:xfrm>
+          <a:prstGeom prst="rect">
+            <a:avLst/>
+          </a:prstGeom>
+        </p:spPr>
+      </p:pic>
     </p:spTree>
   </p:cSld>
   <p:clrMapOvr>
@@ -19573,7 +18774,7 @@
             <a:pPr algn="ctr"/>
             <a:r>
               <a:rPr lang="en-US" dirty="0"/>
-              <a:t>20 / 25</a:t>
+              <a:t>20 / 26</a:t>
             </a:r>
             <a:endParaRPr lang="el-GR" dirty="0"/>
           </a:p>
@@ -20105,7 +19306,7 @@
             <a:pPr algn="ctr"/>
             <a:r>
               <a:rPr lang="en-US" dirty="0"/>
-              <a:t>21 / 25</a:t>
+              <a:t>21 / 26</a:t>
             </a:r>
             <a:endParaRPr lang="el-GR" dirty="0"/>
           </a:p>
@@ -20811,7 +20012,7 @@
             <a:pPr algn="ctr"/>
             <a:r>
               <a:rPr lang="en-US" dirty="0"/>
-              <a:t>22 / 25</a:t>
+              <a:t>22 / 26</a:t>
             </a:r>
             <a:endParaRPr lang="el-GR" dirty="0"/>
           </a:p>
@@ -21587,7 +20788,7 @@
             <a:pPr algn="ctr"/>
             <a:r>
               <a:rPr lang="en-US" dirty="0"/>
-              <a:t>23 / 25</a:t>
+              <a:t>23 / 26</a:t>
             </a:r>
             <a:endParaRPr lang="el-GR" dirty="0"/>
           </a:p>
@@ -21662,7 +20863,7 @@
         <p:spPr>
           <a:xfrm>
             <a:off x="571500" y="476250"/>
-            <a:ext cx="11601450" cy="647700"/>
+            <a:ext cx="11601450" cy="507831"/>
           </a:xfrm>
           <a:prstGeom prst="rect">
             <a:avLst/>
@@ -21688,18 +20889,32 @@
               <a:buNone/>
             </a:pPr>
             <a:r>
-              <a:rPr lang="en-US" sz="3300" b="1" i="0" u="none" strike="noStrike" cap="none">
+              <a:rPr lang="en-US" sz="3300" b="1" i="0" u="none" strike="noStrike" cap="none" dirty="0" err="1">
                 <a:solidFill>
                   <a:srgbClr val="005088"/>
                 </a:solidFill>
-                <a:latin typeface="Poppins"/>
+                <a:latin typeface="+mn-lt"/>
                 <a:ea typeface="Poppins"/>
                 <a:cs typeface="Poppins"/>
                 <a:sym typeface="Poppins"/>
               </a:rPr>
-              <a:t>Βιβλιογραφία</a:t>
-            </a:r>
-            <a:endParaRPr/>
+              <a:t>Βι</a:t>
+            </a:r>
+            <a:r>
+              <a:rPr lang="en-US" sz="3300" b="1" i="0" u="none" strike="noStrike" cap="none" dirty="0">
+                <a:solidFill>
+                  <a:srgbClr val="005088"/>
+                </a:solidFill>
+                <a:latin typeface="+mn-lt"/>
+                <a:ea typeface="Poppins"/>
+                <a:cs typeface="Poppins"/>
+                <a:sym typeface="Poppins"/>
+              </a:rPr>
+              <a:t>βλιογραφία</a:t>
+            </a:r>
+            <a:endParaRPr dirty="0">
+              <a:latin typeface="+mn-lt"/>
+            </a:endParaRPr>
           </a:p>
         </p:txBody>
       </p:sp>
@@ -22337,7 +21552,7 @@
             <a:pPr algn="ctr"/>
             <a:r>
               <a:rPr lang="en-US" dirty="0"/>
-              <a:t>24 / 25</a:t>
+              <a:t>24 / 26</a:t>
             </a:r>
             <a:endParaRPr lang="el-GR" dirty="0"/>
           </a:p>
@@ -22352,6 +21567,778 @@
 </file>
 
 <file path=ppt/slides/slide25.xml><?xml version="1.0" encoding="utf-8"?>
+<p:sld xmlns:a="http://schemas.openxmlformats.org/drawingml/2006/main" xmlns:r="http://schemas.openxmlformats.org/officeDocument/2006/relationships" xmlns:p="http://schemas.openxmlformats.org/presentationml/2006/main">
+  <p:cSld>
+    <p:spTree>
+      <p:nvGrpSpPr>
+        <p:cNvPr id="1" name="Shape 438">
+          <a:extLst>
+            <a:ext uri="{FF2B5EF4-FFF2-40B4-BE49-F238E27FC236}">
+              <a16:creationId xmlns:a16="http://schemas.microsoft.com/office/drawing/2014/main" id="{9AE06368-ED99-FE7F-A8F0-D500FDD06E74}"/>
+            </a:ext>
+          </a:extLst>
+        </p:cNvPr>
+        <p:cNvGrpSpPr/>
+        <p:nvPr/>
+      </p:nvGrpSpPr>
+      <p:grpSpPr>
+        <a:xfrm>
+          <a:off x="0" y="0"/>
+          <a:ext cx="0" cy="0"/>
+          <a:chOff x="0" y="0"/>
+          <a:chExt cx="0" cy="0"/>
+        </a:xfrm>
+      </p:grpSpPr>
+      <p:pic>
+        <p:nvPicPr>
+          <p:cNvPr id="439" name="Google Shape;439;p33" descr="image.png">
+            <a:extLst>
+              <a:ext uri="{FF2B5EF4-FFF2-40B4-BE49-F238E27FC236}">
+                <a16:creationId xmlns:a16="http://schemas.microsoft.com/office/drawing/2014/main" id="{BDF230B9-E288-D22D-1062-39BE3319BEF9}"/>
+              </a:ext>
+            </a:extLst>
+          </p:cNvPr>
+          <p:cNvPicPr preferRelativeResize="0"/>
+          <p:nvPr/>
+        </p:nvPicPr>
+        <p:blipFill rotWithShape="1">
+          <a:blip r:embed="rId3">
+            <a:alphaModFix/>
+          </a:blip>
+          <a:srcRect/>
+          <a:stretch/>
+        </p:blipFill>
+        <p:spPr>
+          <a:xfrm>
+            <a:off x="0" y="0"/>
+            <a:ext cx="12192000" cy="6858000"/>
+          </a:xfrm>
+          <a:prstGeom prst="rect">
+            <a:avLst/>
+          </a:prstGeom>
+          <a:noFill/>
+          <a:ln>
+            <a:noFill/>
+          </a:ln>
+        </p:spPr>
+      </p:pic>
+      <p:sp>
+        <p:nvSpPr>
+          <p:cNvPr id="441" name="Google Shape;441;p33">
+            <a:extLst>
+              <a:ext uri="{FF2B5EF4-FFF2-40B4-BE49-F238E27FC236}">
+                <a16:creationId xmlns:a16="http://schemas.microsoft.com/office/drawing/2014/main" id="{D9CFADC3-7219-FC7A-D70B-E2B5A39FEE70}"/>
+              </a:ext>
+            </a:extLst>
+          </p:cNvPr>
+          <p:cNvSpPr txBox="1"/>
+          <p:nvPr/>
+        </p:nvSpPr>
+        <p:spPr>
+          <a:xfrm>
+            <a:off x="571500" y="476250"/>
+            <a:ext cx="11601450" cy="507831"/>
+          </a:xfrm>
+          <a:prstGeom prst="rect">
+            <a:avLst/>
+          </a:prstGeom>
+          <a:noFill/>
+          <a:ln>
+            <a:noFill/>
+          </a:ln>
+        </p:spPr>
+        <p:txBody>
+          <a:bodyPr spcFirstLastPara="1" wrap="square" lIns="0" tIns="0" rIns="0" bIns="0" anchor="t" anchorCtr="0">
+            <a:spAutoFit/>
+          </a:bodyPr>
+          <a:lstStyle/>
+          <a:p>
+            <a:pPr marL="0" marR="0" lvl="0" indent="0" algn="l" rtl="0">
+              <a:spcBef>
+                <a:spcPts val="0"/>
+              </a:spcBef>
+              <a:spcAft>
+                <a:spcPts val="0"/>
+              </a:spcAft>
+              <a:buNone/>
+            </a:pPr>
+            <a:r>
+              <a:rPr lang="en-US" sz="3300" b="1" i="0" u="none" strike="noStrike" cap="none" dirty="0" err="1">
+                <a:solidFill>
+                  <a:srgbClr val="005088"/>
+                </a:solidFill>
+                <a:latin typeface="+mn-lt"/>
+                <a:ea typeface="Poppins"/>
+                <a:cs typeface="Poppins"/>
+                <a:sym typeface="Poppins"/>
+              </a:rPr>
+              <a:t>Βι</a:t>
+            </a:r>
+            <a:r>
+              <a:rPr lang="en-US" sz="3300" b="1" i="0" u="none" strike="noStrike" cap="none" dirty="0">
+                <a:solidFill>
+                  <a:srgbClr val="005088"/>
+                </a:solidFill>
+                <a:latin typeface="+mn-lt"/>
+                <a:ea typeface="Poppins"/>
+                <a:cs typeface="Poppins"/>
+                <a:sym typeface="Poppins"/>
+              </a:rPr>
+              <a:t>βλιογραφία </a:t>
+            </a:r>
+            <a:r>
+              <a:rPr lang="el-GR" sz="3300" b="1" i="0" u="none" strike="noStrike" cap="none" dirty="0">
+                <a:solidFill>
+                  <a:srgbClr val="005088"/>
+                </a:solidFill>
+                <a:latin typeface="+mn-lt"/>
+                <a:ea typeface="Poppins"/>
+                <a:cs typeface="Poppins"/>
+                <a:sym typeface="Poppins"/>
+              </a:rPr>
+              <a:t>Εικόνων</a:t>
+            </a:r>
+            <a:endParaRPr dirty="0">
+              <a:latin typeface="+mn-lt"/>
+            </a:endParaRPr>
+          </a:p>
+        </p:txBody>
+      </p:sp>
+      <p:sp>
+        <p:nvSpPr>
+          <p:cNvPr id="442" name="Google Shape;442;p33">
+            <a:extLst>
+              <a:ext uri="{FF2B5EF4-FFF2-40B4-BE49-F238E27FC236}">
+                <a16:creationId xmlns:a16="http://schemas.microsoft.com/office/drawing/2014/main" id="{EC276344-A377-A122-47A1-F7F65FE7297D}"/>
+              </a:ext>
+            </a:extLst>
+          </p:cNvPr>
+          <p:cNvSpPr/>
+          <p:nvPr/>
+        </p:nvSpPr>
+        <p:spPr>
+          <a:xfrm>
+            <a:off x="571500" y="1190625"/>
+            <a:ext cx="11049000" cy="28575"/>
+          </a:xfrm>
+          <a:prstGeom prst="rect">
+            <a:avLst/>
+          </a:prstGeom>
+          <a:solidFill>
+            <a:srgbClr val="F1F5F9"/>
+          </a:solidFill>
+          <a:ln>
+            <a:noFill/>
+          </a:ln>
+        </p:spPr>
+        <p:txBody>
+          <a:bodyPr spcFirstLastPara="1" wrap="square" lIns="91425" tIns="45700" rIns="91425" bIns="45700" anchor="ctr" anchorCtr="0">
+            <a:noAutofit/>
+          </a:bodyPr>
+          <a:lstStyle/>
+          <a:p>
+            <a:pPr marL="0" marR="0" lvl="0" indent="0" algn="ctr" rtl="0">
+              <a:spcBef>
+                <a:spcPts val="0"/>
+              </a:spcBef>
+              <a:spcAft>
+                <a:spcPts val="0"/>
+              </a:spcAft>
+              <a:buNone/>
+            </a:pPr>
+            <a:endParaRPr sz="1800" b="0" i="0" u="none" strike="noStrike" cap="none">
+              <a:solidFill>
+                <a:schemeClr val="dk1"/>
+              </a:solidFill>
+              <a:latin typeface="Calibri"/>
+              <a:ea typeface="Calibri"/>
+              <a:cs typeface="Calibri"/>
+              <a:sym typeface="Calibri"/>
+            </a:endParaRPr>
+          </a:p>
+        </p:txBody>
+      </p:sp>
+      <p:sp>
+        <p:nvSpPr>
+          <p:cNvPr id="443" name="Google Shape;443;p33">
+            <a:extLst>
+              <a:ext uri="{FF2B5EF4-FFF2-40B4-BE49-F238E27FC236}">
+                <a16:creationId xmlns:a16="http://schemas.microsoft.com/office/drawing/2014/main" id="{4987165D-26BD-ABBE-1EC2-D144B5CBA748}"/>
+              </a:ext>
+            </a:extLst>
+          </p:cNvPr>
+          <p:cNvSpPr txBox="1"/>
+          <p:nvPr/>
+        </p:nvSpPr>
+        <p:spPr>
+          <a:xfrm>
+            <a:off x="1000125" y="3079724"/>
+            <a:ext cx="10620375" cy="290849"/>
+          </a:xfrm>
+          <a:prstGeom prst="rect">
+            <a:avLst/>
+          </a:prstGeom>
+          <a:noFill/>
+          <a:ln>
+            <a:noFill/>
+          </a:ln>
+        </p:spPr>
+        <p:txBody>
+          <a:bodyPr spcFirstLastPara="1" wrap="square" lIns="0" tIns="0" rIns="0" bIns="0" anchor="t" anchorCtr="0">
+            <a:spAutoFit/>
+          </a:bodyPr>
+          <a:lstStyle/>
+          <a:p>
+            <a:pPr lvl="0">
+              <a:lnSpc>
+                <a:spcPct val="139925"/>
+              </a:lnSpc>
+            </a:pPr>
+            <a:r>
+              <a:rPr lang="el-GR" sz="1350" b="0" i="0" u="none" strike="noStrike" cap="none" dirty="0">
+                <a:solidFill>
+                  <a:srgbClr val="334155"/>
+                </a:solidFill>
+                <a:latin typeface="+mn-lt"/>
+                <a:ea typeface="Lato"/>
+                <a:cs typeface="Lato"/>
+                <a:sym typeface="Lato"/>
+              </a:rPr>
+              <a:t>Ομοσπονδιακή Μάθηση - </a:t>
+            </a:r>
+            <a:r>
+              <a:rPr lang="en-US" sz="1350" dirty="0">
+                <a:solidFill>
+                  <a:srgbClr val="334155"/>
+                </a:solidFill>
+                <a:latin typeface="+mn-lt"/>
+                <a:ea typeface="Lato"/>
+                <a:cs typeface="Lato"/>
+                <a:sym typeface="Lato"/>
+              </a:rPr>
+              <a:t>https://blogs.nvidia.com/blog/what-is-federated-learning/</a:t>
+            </a:r>
+            <a:endParaRPr dirty="0">
+              <a:latin typeface="+mn-lt"/>
+            </a:endParaRPr>
+          </a:p>
+        </p:txBody>
+      </p:sp>
+      <p:sp>
+        <p:nvSpPr>
+          <p:cNvPr id="444" name="Google Shape;444;p33">
+            <a:extLst>
+              <a:ext uri="{FF2B5EF4-FFF2-40B4-BE49-F238E27FC236}">
+                <a16:creationId xmlns:a16="http://schemas.microsoft.com/office/drawing/2014/main" id="{127BB4E9-6B95-3EDC-993A-AD7ABF6F67D4}"/>
+              </a:ext>
+            </a:extLst>
+          </p:cNvPr>
+          <p:cNvSpPr txBox="1"/>
+          <p:nvPr/>
+        </p:nvSpPr>
+        <p:spPr>
+          <a:xfrm>
+            <a:off x="1000125" y="3510899"/>
+            <a:ext cx="10620375" cy="301621"/>
+          </a:xfrm>
+          <a:prstGeom prst="rect">
+            <a:avLst/>
+          </a:prstGeom>
+          <a:noFill/>
+          <a:ln>
+            <a:noFill/>
+          </a:ln>
+        </p:spPr>
+        <p:txBody>
+          <a:bodyPr spcFirstLastPara="1" wrap="square" lIns="0" tIns="0" rIns="0" bIns="0" anchor="t" anchorCtr="0">
+            <a:spAutoFit/>
+          </a:bodyPr>
+          <a:lstStyle/>
+          <a:p>
+            <a:pPr lvl="0">
+              <a:lnSpc>
+                <a:spcPct val="139925"/>
+              </a:lnSpc>
+            </a:pPr>
+            <a:r>
+              <a:rPr lang="el-GR" sz="1350" dirty="0">
+                <a:solidFill>
+                  <a:srgbClr val="334155"/>
+                </a:solidFill>
+                <a:latin typeface="+mn-lt"/>
+                <a:ea typeface="Lato"/>
+                <a:cs typeface="Lato"/>
+                <a:sym typeface="Lato"/>
+              </a:rPr>
+              <a:t>Αλγόριθμος </a:t>
+            </a:r>
+            <a:r>
+              <a:rPr lang="en-US" sz="1350" dirty="0">
+                <a:solidFill>
+                  <a:srgbClr val="334155"/>
+                </a:solidFill>
+                <a:latin typeface="+mn-lt"/>
+                <a:ea typeface="Lato"/>
+                <a:cs typeface="Lato"/>
+                <a:sym typeface="Lato"/>
+              </a:rPr>
+              <a:t>SMOTE - https://www.analyticsvidhya.com/blog/2020/10/overcoming-class-imbalance-using-smote-techniques/</a:t>
+            </a:r>
+            <a:endParaRPr dirty="0">
+              <a:latin typeface="+mn-lt"/>
+            </a:endParaRPr>
+          </a:p>
+        </p:txBody>
+      </p:sp>
+      <p:sp>
+        <p:nvSpPr>
+          <p:cNvPr id="445" name="Google Shape;445;p33">
+            <a:extLst>
+              <a:ext uri="{FF2B5EF4-FFF2-40B4-BE49-F238E27FC236}">
+                <a16:creationId xmlns:a16="http://schemas.microsoft.com/office/drawing/2014/main" id="{2BC1A95E-C534-02B7-C5A0-6646A3326FD2}"/>
+              </a:ext>
+            </a:extLst>
+          </p:cNvPr>
+          <p:cNvSpPr txBox="1"/>
+          <p:nvPr/>
+        </p:nvSpPr>
+        <p:spPr>
+          <a:xfrm>
+            <a:off x="1000125" y="3939271"/>
+            <a:ext cx="10620375" cy="301621"/>
+          </a:xfrm>
+          <a:prstGeom prst="rect">
+            <a:avLst/>
+          </a:prstGeom>
+          <a:noFill/>
+          <a:ln>
+            <a:noFill/>
+          </a:ln>
+        </p:spPr>
+        <p:txBody>
+          <a:bodyPr spcFirstLastPara="1" wrap="square" lIns="0" tIns="0" rIns="0" bIns="0" anchor="t" anchorCtr="0">
+            <a:spAutoFit/>
+          </a:bodyPr>
+          <a:lstStyle/>
+          <a:p>
+            <a:pPr lvl="0">
+              <a:lnSpc>
+                <a:spcPct val="139925"/>
+              </a:lnSpc>
+            </a:pPr>
+            <a:r>
+              <a:rPr lang="el-GR" sz="1350" dirty="0">
+                <a:solidFill>
+                  <a:srgbClr val="334155"/>
+                </a:solidFill>
+                <a:latin typeface="+mn-lt"/>
+                <a:ea typeface="Lato"/>
+                <a:cs typeface="Lato"/>
+                <a:sym typeface="Lato"/>
+              </a:rPr>
+              <a:t>Πλήρως </a:t>
+            </a:r>
+            <a:r>
+              <a:rPr lang="el-GR" sz="1350" dirty="0" err="1">
+                <a:solidFill>
+                  <a:srgbClr val="334155"/>
+                </a:solidFill>
+                <a:latin typeface="+mn-lt"/>
+                <a:ea typeface="Lato"/>
+                <a:cs typeface="Lato"/>
+                <a:sym typeface="Lato"/>
+              </a:rPr>
+              <a:t>Ομομορφική</a:t>
+            </a:r>
+            <a:r>
+              <a:rPr lang="el-GR" sz="1350" dirty="0">
+                <a:solidFill>
+                  <a:srgbClr val="334155"/>
+                </a:solidFill>
+                <a:latin typeface="+mn-lt"/>
+                <a:ea typeface="Lato"/>
+                <a:cs typeface="Lato"/>
+                <a:sym typeface="Lato"/>
+              </a:rPr>
+              <a:t> Κρυπτογράφηση (</a:t>
+            </a:r>
+            <a:r>
+              <a:rPr lang="en-US" sz="1350" dirty="0">
+                <a:solidFill>
+                  <a:srgbClr val="334155"/>
+                </a:solidFill>
+                <a:latin typeface="+mn-lt"/>
+                <a:ea typeface="Lato"/>
+                <a:cs typeface="Lato"/>
+                <a:sym typeface="Lato"/>
+              </a:rPr>
+              <a:t>FHE) -</a:t>
+            </a:r>
+            <a:r>
+              <a:rPr lang="el-GR" sz="1350" dirty="0">
+                <a:solidFill>
+                  <a:srgbClr val="334155"/>
+                </a:solidFill>
+                <a:latin typeface="+mn-lt"/>
+                <a:ea typeface="Lato"/>
+                <a:cs typeface="Lato"/>
+                <a:sym typeface="Lato"/>
+              </a:rPr>
+              <a:t> </a:t>
+            </a:r>
+            <a:r>
+              <a:rPr lang="en-US" sz="1350" dirty="0">
+                <a:solidFill>
+                  <a:srgbClr val="334155"/>
+                </a:solidFill>
+                <a:latin typeface="+mn-lt"/>
+                <a:ea typeface="Lato"/>
+                <a:cs typeface="Lato"/>
+                <a:sym typeface="Lato"/>
+              </a:rPr>
+              <a:t>https://www.linkedin.com/pulse/what-fully-homomorphic-encryption-gregory-boland-wi3ue/ </a:t>
+            </a:r>
+            <a:endParaRPr dirty="0">
+              <a:latin typeface="+mn-lt"/>
+            </a:endParaRPr>
+          </a:p>
+        </p:txBody>
+      </p:sp>
+      <p:sp>
+        <p:nvSpPr>
+          <p:cNvPr id="446" name="Google Shape;446;p33">
+            <a:extLst>
+              <a:ext uri="{FF2B5EF4-FFF2-40B4-BE49-F238E27FC236}">
+                <a16:creationId xmlns:a16="http://schemas.microsoft.com/office/drawing/2014/main" id="{9BEA51BD-577B-A45C-60BF-6CEBF18ADCFD}"/>
+              </a:ext>
+            </a:extLst>
+          </p:cNvPr>
+          <p:cNvSpPr txBox="1"/>
+          <p:nvPr/>
+        </p:nvSpPr>
+        <p:spPr>
+          <a:xfrm>
+            <a:off x="1000125" y="4370446"/>
+            <a:ext cx="10620375" cy="301621"/>
+          </a:xfrm>
+          <a:prstGeom prst="rect">
+            <a:avLst/>
+          </a:prstGeom>
+          <a:noFill/>
+          <a:ln>
+            <a:noFill/>
+          </a:ln>
+        </p:spPr>
+        <p:txBody>
+          <a:bodyPr spcFirstLastPara="1" wrap="square" lIns="0" tIns="0" rIns="0" bIns="0" anchor="t" anchorCtr="0">
+            <a:spAutoFit/>
+          </a:bodyPr>
+          <a:lstStyle/>
+          <a:p>
+            <a:pPr marL="0" marR="0" lvl="0" indent="0" algn="l" rtl="0">
+              <a:lnSpc>
+                <a:spcPct val="139925"/>
+              </a:lnSpc>
+              <a:spcBef>
+                <a:spcPts val="0"/>
+              </a:spcBef>
+              <a:spcAft>
+                <a:spcPts val="0"/>
+              </a:spcAft>
+              <a:buNone/>
+            </a:pPr>
+            <a:r>
+              <a:rPr lang="el-GR" sz="1350" dirty="0">
+                <a:solidFill>
+                  <a:srgbClr val="334155"/>
+                </a:solidFill>
+                <a:latin typeface="+mn-lt"/>
+                <a:ea typeface="Lato"/>
+                <a:cs typeface="Lato"/>
+                <a:sym typeface="Lato"/>
+              </a:rPr>
+              <a:t>Όλες οι υπόλοιπες εικόνες και διαγράμματα αποτελούν προϊόν προσωπικής εργασίας ή/και προκύπτουν από την πειραματική διαδικασία.</a:t>
+            </a:r>
+            <a:endParaRPr dirty="0">
+              <a:latin typeface="+mn-lt"/>
+            </a:endParaRPr>
+          </a:p>
+        </p:txBody>
+      </p:sp>
+      <p:pic>
+        <p:nvPicPr>
+          <p:cNvPr id="447" name="Google Shape;447;p33" descr="image.png">
+            <a:extLst>
+              <a:ext uri="{FF2B5EF4-FFF2-40B4-BE49-F238E27FC236}">
+                <a16:creationId xmlns:a16="http://schemas.microsoft.com/office/drawing/2014/main" id="{2CC0254E-226D-AB78-30AB-734F17918B69}"/>
+              </a:ext>
+            </a:extLst>
+          </p:cNvPr>
+          <p:cNvPicPr preferRelativeResize="0"/>
+          <p:nvPr/>
+        </p:nvPicPr>
+        <p:blipFill rotWithShape="1">
+          <a:blip r:embed="rId4">
+            <a:alphaModFix/>
+          </a:blip>
+          <a:srcRect/>
+          <a:stretch/>
+        </p:blipFill>
+        <p:spPr>
+          <a:xfrm>
+            <a:off x="571500" y="3130153"/>
+            <a:ext cx="123825" cy="200025"/>
+          </a:xfrm>
+          <a:prstGeom prst="rect">
+            <a:avLst/>
+          </a:prstGeom>
+          <a:noFill/>
+          <a:ln>
+            <a:noFill/>
+          </a:ln>
+        </p:spPr>
+      </p:pic>
+      <p:pic>
+        <p:nvPicPr>
+          <p:cNvPr id="448" name="Google Shape;448;p33" descr="image.png">
+            <a:extLst>
+              <a:ext uri="{FF2B5EF4-FFF2-40B4-BE49-F238E27FC236}">
+                <a16:creationId xmlns:a16="http://schemas.microsoft.com/office/drawing/2014/main" id="{75A52B63-EFF0-26F6-6FDB-0C7D13326263}"/>
+              </a:ext>
+            </a:extLst>
+          </p:cNvPr>
+          <p:cNvPicPr preferRelativeResize="0"/>
+          <p:nvPr/>
+        </p:nvPicPr>
+        <p:blipFill rotWithShape="1">
+          <a:blip r:embed="rId4">
+            <a:alphaModFix/>
+          </a:blip>
+          <a:srcRect/>
+          <a:stretch/>
+        </p:blipFill>
+        <p:spPr>
+          <a:xfrm>
+            <a:off x="571500" y="3560564"/>
+            <a:ext cx="123825" cy="200025"/>
+          </a:xfrm>
+          <a:prstGeom prst="rect">
+            <a:avLst/>
+          </a:prstGeom>
+          <a:noFill/>
+          <a:ln>
+            <a:noFill/>
+          </a:ln>
+        </p:spPr>
+      </p:pic>
+      <p:pic>
+        <p:nvPicPr>
+          <p:cNvPr id="449" name="Google Shape;449;p33" descr="image.png">
+            <a:extLst>
+              <a:ext uri="{FF2B5EF4-FFF2-40B4-BE49-F238E27FC236}">
+                <a16:creationId xmlns:a16="http://schemas.microsoft.com/office/drawing/2014/main" id="{CA715435-B6E8-E49A-9E25-8DA73718F874}"/>
+              </a:ext>
+            </a:extLst>
+          </p:cNvPr>
+          <p:cNvPicPr preferRelativeResize="0"/>
+          <p:nvPr/>
+        </p:nvPicPr>
+        <p:blipFill rotWithShape="1">
+          <a:blip r:embed="rId4">
+            <a:alphaModFix/>
+          </a:blip>
+          <a:srcRect/>
+          <a:stretch/>
+        </p:blipFill>
+        <p:spPr>
+          <a:xfrm>
+            <a:off x="571500" y="3990975"/>
+            <a:ext cx="123825" cy="200025"/>
+          </a:xfrm>
+          <a:prstGeom prst="rect">
+            <a:avLst/>
+          </a:prstGeom>
+          <a:noFill/>
+          <a:ln>
+            <a:noFill/>
+          </a:ln>
+        </p:spPr>
+      </p:pic>
+      <p:pic>
+        <p:nvPicPr>
+          <p:cNvPr id="450" name="Google Shape;450;p33" descr="image.png">
+            <a:extLst>
+              <a:ext uri="{FF2B5EF4-FFF2-40B4-BE49-F238E27FC236}">
+                <a16:creationId xmlns:a16="http://schemas.microsoft.com/office/drawing/2014/main" id="{5E6D91F5-9889-C2D8-E6DA-E98A64664E11}"/>
+              </a:ext>
+            </a:extLst>
+          </p:cNvPr>
+          <p:cNvPicPr preferRelativeResize="0"/>
+          <p:nvPr/>
+        </p:nvPicPr>
+        <p:blipFill rotWithShape="1">
+          <a:blip r:embed="rId4">
+            <a:alphaModFix/>
+          </a:blip>
+          <a:srcRect/>
+          <a:stretch/>
+        </p:blipFill>
+        <p:spPr>
+          <a:xfrm>
+            <a:off x="571500" y="4421385"/>
+            <a:ext cx="123825" cy="200025"/>
+          </a:xfrm>
+          <a:prstGeom prst="rect">
+            <a:avLst/>
+          </a:prstGeom>
+          <a:noFill/>
+          <a:ln>
+            <a:noFill/>
+          </a:ln>
+        </p:spPr>
+      </p:pic>
+      <p:sp>
+        <p:nvSpPr>
+          <p:cNvPr id="6" name="TextBox 5">
+            <a:extLst>
+              <a:ext uri="{FF2B5EF4-FFF2-40B4-BE49-F238E27FC236}">
+                <a16:creationId xmlns:a16="http://schemas.microsoft.com/office/drawing/2014/main" id="{D49A510D-5253-17E8-4306-A4F966D07B54}"/>
+              </a:ext>
+            </a:extLst>
+          </p:cNvPr>
+          <p:cNvSpPr txBox="1"/>
+          <p:nvPr/>
+        </p:nvSpPr>
+        <p:spPr>
+          <a:xfrm>
+            <a:off x="914400" y="4782066"/>
+            <a:ext cx="7715250" cy="307777"/>
+          </a:xfrm>
+          <a:prstGeom prst="rect">
+            <a:avLst/>
+          </a:prstGeom>
+          <a:noFill/>
+        </p:spPr>
+        <p:txBody>
+          <a:bodyPr wrap="square" rtlCol="0">
+            <a:spAutoFit/>
+          </a:bodyPr>
+          <a:lstStyle/>
+          <a:p>
+            <a:endParaRPr lang="el-GR" sz="1350" dirty="0">
+              <a:solidFill>
+                <a:srgbClr val="334155"/>
+              </a:solidFill>
+            </a:endParaRPr>
+          </a:p>
+        </p:txBody>
+      </p:sp>
+      <p:sp>
+        <p:nvSpPr>
+          <p:cNvPr id="7" name="TextBox 6">
+            <a:extLst>
+              <a:ext uri="{FF2B5EF4-FFF2-40B4-BE49-F238E27FC236}">
+                <a16:creationId xmlns:a16="http://schemas.microsoft.com/office/drawing/2014/main" id="{2672EED9-35DB-5782-3B26-292645555E8B}"/>
+              </a:ext>
+            </a:extLst>
+          </p:cNvPr>
+          <p:cNvSpPr txBox="1"/>
+          <p:nvPr/>
+        </p:nvSpPr>
+        <p:spPr>
+          <a:xfrm>
+            <a:off x="914400" y="5197646"/>
+            <a:ext cx="8089900" cy="307777"/>
+          </a:xfrm>
+          <a:prstGeom prst="rect">
+            <a:avLst/>
+          </a:prstGeom>
+          <a:noFill/>
+        </p:spPr>
+        <p:txBody>
+          <a:bodyPr wrap="square" rtlCol="0">
+            <a:spAutoFit/>
+          </a:bodyPr>
+          <a:lstStyle/>
+          <a:p>
+            <a:endParaRPr lang="el-GR" sz="1350" dirty="0"/>
+          </a:p>
+        </p:txBody>
+      </p:sp>
+      <p:sp>
+        <p:nvSpPr>
+          <p:cNvPr id="8" name="Ορθογώνιο: Στρογγύλεμα γωνιών 7">
+            <a:extLst>
+              <a:ext uri="{FF2B5EF4-FFF2-40B4-BE49-F238E27FC236}">
+                <a16:creationId xmlns:a16="http://schemas.microsoft.com/office/drawing/2014/main" id="{762E1D8D-2B11-4E5E-7DCC-13E96F291C76}"/>
+              </a:ext>
+            </a:extLst>
+          </p:cNvPr>
+          <p:cNvSpPr/>
+          <p:nvPr/>
+        </p:nvSpPr>
+        <p:spPr>
+          <a:xfrm>
+            <a:off x="11144250" y="6381750"/>
+            <a:ext cx="873125" cy="257662"/>
+          </a:xfrm>
+          <a:prstGeom prst="roundRect">
+            <a:avLst>
+              <a:gd name="adj" fmla="val 50000"/>
+            </a:avLst>
+          </a:prstGeom>
+          <a:solidFill>
+            <a:schemeClr val="accent1">
+              <a:lumMod val="75000"/>
+            </a:schemeClr>
+          </a:solidFill>
+          <a:ln>
+            <a:noFill/>
+          </a:ln>
+        </p:spPr>
+        <p:style>
+          <a:lnRef idx="2">
+            <a:schemeClr val="accent1">
+              <a:shade val="15000"/>
+            </a:schemeClr>
+          </a:lnRef>
+          <a:fillRef idx="1">
+            <a:schemeClr val="accent1"/>
+          </a:fillRef>
+          <a:effectRef idx="0">
+            <a:schemeClr val="accent1"/>
+          </a:effectRef>
+          <a:fontRef idx="minor">
+            <a:schemeClr val="lt1"/>
+          </a:fontRef>
+        </p:style>
+        <p:txBody>
+          <a:bodyPr rtlCol="0" anchor="ctr"/>
+          <a:lstStyle/>
+          <a:p>
+            <a:pPr algn="ctr"/>
+            <a:r>
+              <a:rPr lang="en-US" dirty="0"/>
+              <a:t>25 / 26</a:t>
+            </a:r>
+            <a:endParaRPr lang="el-GR" dirty="0"/>
+          </a:p>
+        </p:txBody>
+      </p:sp>
+    </p:spTree>
+    <p:extLst>
+      <p:ext uri="{BB962C8B-B14F-4D97-AF65-F5344CB8AC3E}">
+        <p14:creationId xmlns:p14="http://schemas.microsoft.com/office/powerpoint/2010/main" val="2933104379"/>
+      </p:ext>
+    </p:extLst>
+  </p:cSld>
+  <p:clrMapOvr>
+    <a:masterClrMapping/>
+  </p:clrMapOvr>
+</p:sld>
+</file>
+
+<file path=ppt/slides/slide26.xml><?xml version="1.0" encoding="utf-8"?>
 <p:sld xmlns:a="http://schemas.openxmlformats.org/drawingml/2006/main" xmlns:r="http://schemas.openxmlformats.org/officeDocument/2006/relationships" xmlns:p="http://schemas.openxmlformats.org/presentationml/2006/main">
   <p:cSld>
     <p:spTree>
@@ -22749,12 +22736,8 @@
           <a:p>
             <a:pPr algn="ctr"/>
             <a:r>
-              <a:rPr lang="en-US"/>
-              <a:t>25 </a:t>
-            </a:r>
-            <a:r>
               <a:rPr lang="en-US" dirty="0"/>
-              <a:t>/ 25</a:t>
+              <a:t>26 / 26</a:t>
             </a:r>
             <a:endParaRPr lang="el-GR" dirty="0"/>
           </a:p>
@@ -23584,7 +23567,7 @@
             <a:pPr algn="ctr"/>
             <a:r>
               <a:rPr lang="en-US" dirty="0"/>
-              <a:t>3 / 25</a:t>
+              <a:t>3 / 26</a:t>
             </a:r>
             <a:endParaRPr lang="el-GR" dirty="0"/>
           </a:p>
@@ -24414,36 +24397,6 @@
           </a:ln>
         </p:spPr>
       </p:pic>
-      <p:pic>
-        <p:nvPicPr>
-          <p:cNvPr id="3" name="Εικόνα 2">
-            <a:extLst>
-              <a:ext uri="{FF2B5EF4-FFF2-40B4-BE49-F238E27FC236}">
-                <a16:creationId xmlns:a16="http://schemas.microsoft.com/office/drawing/2014/main" id="{41A12280-E780-762C-8109-5B9042F58BB6}"/>
-              </a:ext>
-            </a:extLst>
-          </p:cNvPr>
-          <p:cNvPicPr>
-            <a:picLocks noChangeAspect="1"/>
-          </p:cNvPicPr>
-          <p:nvPr/>
-        </p:nvPicPr>
-        <p:blipFill>
-          <a:blip r:embed="rId5"/>
-          <a:stretch>
-            <a:fillRect/>
-          </a:stretch>
-        </p:blipFill>
-        <p:spPr>
-          <a:xfrm>
-            <a:off x="571500" y="1858606"/>
-            <a:ext cx="4434133" cy="4121262"/>
-          </a:xfrm>
-          <a:prstGeom prst="rect">
-            <a:avLst/>
-          </a:prstGeom>
-        </p:spPr>
-      </p:pic>
       <p:sp>
         <p:nvSpPr>
           <p:cNvPr id="4" name="Ορθογώνιο: Στρογγύλεμα γωνιών 3">
@@ -24498,12 +24451,42 @@
             <a:pPr algn="ctr"/>
             <a:r>
               <a:rPr lang="en-US" dirty="0"/>
-              <a:t>4 / 25</a:t>
+              <a:t>4 / 26</a:t>
             </a:r>
             <a:endParaRPr lang="el-GR" dirty="0"/>
           </a:p>
         </p:txBody>
       </p:sp>
+      <p:pic>
+        <p:nvPicPr>
+          <p:cNvPr id="5" name="Εικόνα 4">
+            <a:extLst>
+              <a:ext uri="{FF2B5EF4-FFF2-40B4-BE49-F238E27FC236}">
+                <a16:creationId xmlns:a16="http://schemas.microsoft.com/office/drawing/2014/main" id="{57033CE0-B829-0E0A-81C9-B7F2C4606504}"/>
+              </a:ext>
+            </a:extLst>
+          </p:cNvPr>
+          <p:cNvPicPr>
+            <a:picLocks noChangeAspect="1"/>
+          </p:cNvPicPr>
+          <p:nvPr/>
+        </p:nvPicPr>
+        <p:blipFill>
+          <a:blip r:embed="rId5"/>
+          <a:stretch>
+            <a:fillRect/>
+          </a:stretch>
+        </p:blipFill>
+        <p:spPr>
+          <a:xfrm>
+            <a:off x="776285" y="2002209"/>
+            <a:ext cx="3937000" cy="3937000"/>
+          </a:xfrm>
+          <a:prstGeom prst="rect">
+            <a:avLst/>
+          </a:prstGeom>
+        </p:spPr>
+      </p:pic>
     </p:spTree>
   </p:cSld>
   <p:clrMapOvr>
@@ -25131,7 +25114,7 @@
             <a:pPr algn="ctr"/>
             <a:r>
               <a:rPr lang="en-US" dirty="0"/>
-              <a:t>5 / 25</a:t>
+              <a:t>5 / 26</a:t>
             </a:r>
             <a:endParaRPr lang="el-GR" dirty="0"/>
           </a:p>
@@ -25937,7 +25920,7 @@
             <a:pPr algn="ctr"/>
             <a:r>
               <a:rPr lang="en-US" dirty="0"/>
-              <a:t>6 / 25</a:t>
+              <a:t>6 / 26</a:t>
             </a:r>
             <a:endParaRPr lang="el-GR" dirty="0"/>
           </a:p>
@@ -26856,7 +26839,7 @@
             <a:pPr algn="ctr"/>
             <a:r>
               <a:rPr lang="en-US" dirty="0"/>
-              <a:t>7 / 25</a:t>
+              <a:t>7 / 26</a:t>
             </a:r>
             <a:endParaRPr lang="el-GR" dirty="0"/>
           </a:p>
@@ -27632,7 +27615,7 @@
             <a:pPr algn="ctr"/>
             <a:r>
               <a:rPr lang="en-US" dirty="0"/>
-              <a:t>8 / 25</a:t>
+              <a:t>8 / 26</a:t>
             </a:r>
           </a:p>
         </p:txBody>
@@ -27909,7 +27892,7 @@
             <a:pPr algn="ctr"/>
             <a:r>
               <a:rPr lang="en-US" dirty="0"/>
-              <a:t>9 / 25</a:t>
+              <a:t>9 / 26</a:t>
             </a:r>
             <a:endParaRPr lang="el-GR" dirty="0"/>
           </a:p>

--- a/presentation/diplom_presentation.pptx
+++ b/presentation/diplom_presentation.pptx
@@ -10980,7 +10980,11 @@
             <a:pPr algn="ctr"/>
             <a:r>
               <a:rPr lang="en-US" dirty="0"/>
-              <a:t>1 / 25</a:t>
+              <a:t>1 </a:t>
+            </a:r>
+            <a:r>
+              <a:rPr lang="en-US"/>
+              <a:t>/ 26</a:t>
             </a:r>
             <a:endParaRPr lang="el-GR" dirty="0"/>
           </a:p>

--- a/presentation/diplom_presentation.pptx
+++ b/presentation/diplom_presentation.pptx
@@ -11854,36 +11854,6 @@
           </a:p>
         </p:txBody>
       </p:sp>
-      <p:pic>
-        <p:nvPicPr>
-          <p:cNvPr id="3" name="Εικόνα 2">
-            <a:extLst>
-              <a:ext uri="{FF2B5EF4-FFF2-40B4-BE49-F238E27FC236}">
-                <a16:creationId xmlns:a16="http://schemas.microsoft.com/office/drawing/2014/main" id="{985D3241-BBD3-9E66-8918-CA4879401824}"/>
-              </a:ext>
-            </a:extLst>
-          </p:cNvPr>
-          <p:cNvPicPr>
-            <a:picLocks noChangeAspect="1"/>
-          </p:cNvPicPr>
-          <p:nvPr/>
-        </p:nvPicPr>
-        <p:blipFill>
-          <a:blip r:embed="rId4"/>
-          <a:stretch>
-            <a:fillRect/>
-          </a:stretch>
-        </p:blipFill>
-        <p:spPr>
-          <a:xfrm>
-            <a:off x="1734104" y="1241163"/>
-            <a:ext cx="8723791" cy="5178687"/>
-          </a:xfrm>
-          <a:prstGeom prst="rect">
-            <a:avLst/>
-          </a:prstGeom>
-        </p:spPr>
-      </p:pic>
       <p:sp>
         <p:nvSpPr>
           <p:cNvPr id="4" name="Ορθογώνιο: Στρογγύλεμα γωνιών 3">
@@ -11944,6 +11914,36 @@
           </a:p>
         </p:txBody>
       </p:sp>
+      <p:pic>
+        <p:nvPicPr>
+          <p:cNvPr id="5" name="Εικόνα 4">
+            <a:extLst>
+              <a:ext uri="{FF2B5EF4-FFF2-40B4-BE49-F238E27FC236}">
+                <a16:creationId xmlns:a16="http://schemas.microsoft.com/office/drawing/2014/main" id="{1A8EC3DB-083F-2FEB-8197-8D8A6FD76462}"/>
+              </a:ext>
+            </a:extLst>
+          </p:cNvPr>
+          <p:cNvPicPr>
+            <a:picLocks noChangeAspect="1"/>
+          </p:cNvPicPr>
+          <p:nvPr/>
+        </p:nvPicPr>
+        <p:blipFill>
+          <a:blip r:embed="rId4"/>
+          <a:stretch>
+            <a:fillRect/>
+          </a:stretch>
+        </p:blipFill>
+        <p:spPr>
+          <a:xfrm>
+            <a:off x="1927121" y="1266842"/>
+            <a:ext cx="8337758" cy="5372570"/>
+          </a:xfrm>
+          <a:prstGeom prst="rect">
+            <a:avLst/>
+          </a:prstGeom>
+        </p:spPr>
+      </p:pic>
     </p:spTree>
     <p:extLst>
       <p:ext uri="{BB962C8B-B14F-4D97-AF65-F5344CB8AC3E}">
@@ -12137,36 +12137,6 @@
           </a:p>
         </p:txBody>
       </p:sp>
-      <p:pic>
-        <p:nvPicPr>
-          <p:cNvPr id="4" name="Εικόνα 3">
-            <a:extLst>
-              <a:ext uri="{FF2B5EF4-FFF2-40B4-BE49-F238E27FC236}">
-                <a16:creationId xmlns:a16="http://schemas.microsoft.com/office/drawing/2014/main" id="{C1745838-A4BD-0C76-822E-8DCDC676FEA1}"/>
-              </a:ext>
-            </a:extLst>
-          </p:cNvPr>
-          <p:cNvPicPr>
-            <a:picLocks noChangeAspect="1"/>
-          </p:cNvPicPr>
-          <p:nvPr/>
-        </p:nvPicPr>
-        <p:blipFill>
-          <a:blip r:embed="rId4"/>
-          <a:stretch>
-            <a:fillRect/>
-          </a:stretch>
-        </p:blipFill>
-        <p:spPr>
-          <a:xfrm>
-            <a:off x="1198776" y="1335997"/>
-            <a:ext cx="9858772" cy="4846276"/>
-          </a:xfrm>
-          <a:prstGeom prst="rect">
-            <a:avLst/>
-          </a:prstGeom>
-        </p:spPr>
-      </p:pic>
       <p:sp>
         <p:nvSpPr>
           <p:cNvPr id="7" name="Ορθογώνιο: Στρογγύλεμα γωνιών 6">
@@ -12227,6 +12197,36 @@
           </a:p>
         </p:txBody>
       </p:sp>
+      <p:pic>
+        <p:nvPicPr>
+          <p:cNvPr id="3" name="Εικόνα 2">
+            <a:extLst>
+              <a:ext uri="{FF2B5EF4-FFF2-40B4-BE49-F238E27FC236}">
+                <a16:creationId xmlns:a16="http://schemas.microsoft.com/office/drawing/2014/main" id="{213ECC1E-9DDC-65A9-E5D6-0777DF3B5013}"/>
+              </a:ext>
+            </a:extLst>
+          </p:cNvPr>
+          <p:cNvPicPr>
+            <a:picLocks noChangeAspect="1"/>
+          </p:cNvPicPr>
+          <p:nvPr/>
+        </p:nvPicPr>
+        <p:blipFill>
+          <a:blip r:embed="rId4"/>
+          <a:stretch>
+            <a:fillRect/>
+          </a:stretch>
+        </p:blipFill>
+        <p:spPr>
+          <a:xfrm>
+            <a:off x="895350" y="1424936"/>
+            <a:ext cx="10229850" cy="4992209"/>
+          </a:xfrm>
+          <a:prstGeom prst="rect">
+            <a:avLst/>
+          </a:prstGeom>
+        </p:spPr>
+      </p:pic>
     </p:spTree>
     <p:extLst>
       <p:ext uri="{BB962C8B-B14F-4D97-AF65-F5344CB8AC3E}">
@@ -27812,36 +27812,6 @@
           </a:p>
         </p:txBody>
       </p:sp>
-      <p:pic>
-        <p:nvPicPr>
-          <p:cNvPr id="3" name="Εικόνα 2">
-            <a:extLst>
-              <a:ext uri="{FF2B5EF4-FFF2-40B4-BE49-F238E27FC236}">
-                <a16:creationId xmlns:a16="http://schemas.microsoft.com/office/drawing/2014/main" id="{A6847812-DC21-7169-6785-30A160978A69}"/>
-              </a:ext>
-            </a:extLst>
-          </p:cNvPr>
-          <p:cNvPicPr>
-            <a:picLocks noChangeAspect="1"/>
-          </p:cNvPicPr>
-          <p:nvPr/>
-        </p:nvPicPr>
-        <p:blipFill>
-          <a:blip r:embed="rId4"/>
-          <a:stretch>
-            <a:fillRect/>
-          </a:stretch>
-        </p:blipFill>
-        <p:spPr>
-          <a:xfrm>
-            <a:off x="1652815" y="1297612"/>
-            <a:ext cx="8707243" cy="5122238"/>
-          </a:xfrm>
-          <a:prstGeom prst="rect">
-            <a:avLst/>
-          </a:prstGeom>
-        </p:spPr>
-      </p:pic>
       <p:sp>
         <p:nvSpPr>
           <p:cNvPr id="5" name="Ορθογώνιο: Στρογγύλεμα γωνιών 4">
@@ -27902,6 +27872,36 @@
           </a:p>
         </p:txBody>
       </p:sp>
+      <p:pic>
+        <p:nvPicPr>
+          <p:cNvPr id="4" name="Εικόνα 3">
+            <a:extLst>
+              <a:ext uri="{FF2B5EF4-FFF2-40B4-BE49-F238E27FC236}">
+                <a16:creationId xmlns:a16="http://schemas.microsoft.com/office/drawing/2014/main" id="{7E8AB661-28BA-9E41-2EC0-8BAEF1C2BBAC}"/>
+              </a:ext>
+            </a:extLst>
+          </p:cNvPr>
+          <p:cNvPicPr>
+            <a:picLocks noChangeAspect="1"/>
+          </p:cNvPicPr>
+          <p:nvPr/>
+        </p:nvPicPr>
+        <p:blipFill>
+          <a:blip r:embed="rId4"/>
+          <a:stretch>
+            <a:fillRect/>
+          </a:stretch>
+        </p:blipFill>
+        <p:spPr>
+          <a:xfrm>
+            <a:off x="2223289" y="1290749"/>
+            <a:ext cx="8297872" cy="5348663"/>
+          </a:xfrm>
+          <a:prstGeom prst="rect">
+            <a:avLst/>
+          </a:prstGeom>
+        </p:spPr>
+      </p:pic>
     </p:spTree>
     <p:extLst>
       <p:ext uri="{BB962C8B-B14F-4D97-AF65-F5344CB8AC3E}">
